--- a/ForgeClaw-Seed-Pitch-Deck.pptx
+++ b/ForgeClaw-Seed-Pitch-Deck.pptx
@@ -4,6 +4,9 @@
   <p:sldMasterIdLst>
     <p:sldMasterId id="2147483648" r:id="rId1"/>
   </p:sldMasterIdLst>
+  <p:notesMasterIdLst>
+    <p:notesMasterId r:id="rId16"/>
+  </p:notesMasterIdLst>
   <p:sldIdLst>
     <p:sldId id="256" r:id="rId2"/>
     <p:sldId id="257" r:id="rId3"/>
@@ -20,10 +23,7 @@
     <p:sldId id="268" r:id="rId14"/>
     <p:sldId id="269" r:id="rId15"/>
   </p:sldIdLst>
-  <p:notesMasterIdLst>
-    <p:notesMasterId r:id="rId16"/>
-  </p:notesMasterIdLst>
-  <p:sldSz cx="9144000" cy="5143500"/>
+  <p:sldSz cx="9144000" cy="5143500" type="screen16x9"/>
   <p:notesSz cx="5143500" cy="9144000"/>
   <p:defaultTextStyle>
     <a:lvl1pPr marL="0" algn="l" defTabSz="914400" rtl="0" eaLnBrk="1" latinLnBrk="0" hangingPunct="1">
@@ -117,6 +117,11 @@
       </a:defRPr>
     </a:lvl9pPr>
   </p:defaultTextStyle>
+  <p:extLst>
+    <p:ext uri="{EFAFB233-063F-42B5-8137-9DF3F51BA10A}">
+      <p15:sldGuideLst xmlns:p15="http://schemas.microsoft.com/office/powerpoint/2012/main"/>
+    </p:ext>
+  </p:extLst>
 </p:presentation>
 </file>
 
@@ -142,234 +147,10 @@
           <a:chExt cx="0" cy="0"/>
         </a:xfrm>
       </p:grpSpPr>
-      <p:sp>
-        <p:nvSpPr>
-          <p:cNvPr id="2" name="Header Placeholder 1"/>
-          <p:cNvSpPr>
-            <a:spLocks noGrp="1"/>
-          </p:cNvSpPr>
-          <p:nvPr>
-            <p:ph type="hdr" sz="quarter"/>
-          </p:nvPr>
-        </p:nvSpPr>
-        <p:spPr>
-          <a:xfrm>
-            <a:off x="0" y="0"/>
-            <a:ext cx="2971800" cy="458788"/>
-          </a:xfrm>
-          <a:prstGeom prst="rect">
-            <a:avLst/>
-          </a:prstGeom>
-        </p:spPr>
-        <p:txBody>
-          <a:bodyPr vert="horz" lIns="91440" tIns="45720" rIns="91440" bIns="45720" rtlCol="0"/>
-          <a:lstStyle>
-            <a:lvl1pPr algn="l">
-              <a:defRPr sz="1200"/>
-            </a:lvl1pPr>
-          </a:lstStyle>
-          <a:p>
-            <a:endParaRPr lang="en-US"/>
-          </a:p>
-        </p:txBody>
-      </p:sp>
-      <p:sp>
-        <p:nvSpPr>
-          <p:cNvPr id="3" name="Date Placeholder 2"/>
-          <p:cNvSpPr>
-            <a:spLocks noGrp="1"/>
-          </p:cNvSpPr>
-          <p:nvPr>
-            <p:ph type="dt" idx="1"/>
-          </p:nvPr>
-        </p:nvSpPr>
-        <p:spPr>
-          <a:xfrm>
-            <a:off x="3884613" y="0"/>
-            <a:ext cx="2971800" cy="458788"/>
-          </a:xfrm>
-          <a:prstGeom prst="rect">
-            <a:avLst/>
-          </a:prstGeom>
-        </p:spPr>
-        <p:txBody>
-          <a:bodyPr vert="horz" lIns="91440" tIns="45720" rIns="91440" bIns="45720" rtlCol="0"/>
-          <a:lstStyle>
-            <a:lvl1pPr algn="r">
-              <a:defRPr sz="1200"/>
-            </a:lvl1pPr>
-          </a:lstStyle>
-          <a:p>
-            <a:fld id="{5282F153-3F37-0F45-9E97-73ACFA13230C}" type="datetimeFigureOut">
-              <a:rPr lang="en-US"/>
-              <a:t>7/23/19</a:t>
-            </a:fld>
-            <a:endParaRPr lang="en-US"/>
-          </a:p>
-        </p:txBody>
-      </p:sp>
-      <p:sp>
-        <p:nvSpPr>
-          <p:cNvPr id="4" name="Slide Image Placeholder 3"/>
-          <p:cNvSpPr>
-            <a:spLocks noGrp="1" noRot="1" noChangeAspect="1"/>
-          </p:cNvSpPr>
-          <p:nvPr>
-            <p:ph type="sldImg" idx="2"/>
-          </p:nvPr>
-        </p:nvSpPr>
-        <p:spPr>
-          <a:xfrm>
-            <a:off x="685800" y="1143000"/>
-            <a:ext cx="5486400" cy="3086100"/>
-          </a:xfrm>
-          <a:prstGeom prst="rect">
-            <a:avLst/>
-          </a:prstGeom>
-          <a:noFill/>
-          <a:ln w="12700">
-            <a:solidFill>
-              <a:prstClr val="black"/>
-            </a:solidFill>
-          </a:ln>
-        </p:spPr>
-        <p:txBody>
-          <a:bodyPr vert="horz" lIns="91440" tIns="45720" rIns="91440" bIns="45720" rtlCol="0" anchor="ctr"/>
-          <a:lstStyle/>
-          <a:p>
-            <a:endParaRPr lang="en-US"/>
-          </a:p>
-        </p:txBody>
-      </p:sp>
-      <p:sp>
-        <p:nvSpPr>
-          <p:cNvPr id="5" name="Notes Placeholder 4"/>
-          <p:cNvSpPr>
-            <a:spLocks noGrp="1"/>
-          </p:cNvSpPr>
-          <p:nvPr>
-            <p:ph type="body" sz="quarter" idx="3"/>
-          </p:nvPr>
-        </p:nvSpPr>
-        <p:spPr>
-          <a:xfrm>
-            <a:off x="685800" y="4400550"/>
-            <a:ext cx="5486400" cy="3600450"/>
-          </a:xfrm>
-          <a:prstGeom prst="rect">
-            <a:avLst/>
-          </a:prstGeom>
-        </p:spPr>
-        <p:txBody>
-          <a:bodyPr vert="horz" lIns="91440" tIns="45720" rIns="91440" bIns="45720" rtlCol="0"/>
-          <a:lstStyle/>
-          <a:p>
-            <a:pPr lvl="0"/>
-            <a:r>
-              <a:rPr lang="en-US"/>
-              <a:t>Click to edit Master text styles</a:t>
-            </a:r>
-          </a:p>
-          <a:p>
-            <a:pPr lvl="1"/>
-            <a:r>
-              <a:rPr lang="en-US"/>
-              <a:t>Second level</a:t>
-            </a:r>
-          </a:p>
-          <a:p>
-            <a:pPr lvl="2"/>
-            <a:r>
-              <a:rPr lang="en-US"/>
-              <a:t>Third level</a:t>
-            </a:r>
-          </a:p>
-          <a:p>
-            <a:pPr lvl="3"/>
-            <a:r>
-              <a:rPr lang="en-US"/>
-              <a:t>Fourth level</a:t>
-            </a:r>
-          </a:p>
-          <a:p>
-            <a:pPr lvl="4"/>
-            <a:r>
-              <a:rPr lang="en-US"/>
-              <a:t>Fifth level</a:t>
-            </a:r>
-          </a:p>
-        </p:txBody>
-      </p:sp>
-      <p:sp>
-        <p:nvSpPr>
-          <p:cNvPr id="6" name="Footer Placeholder 5"/>
-          <p:cNvSpPr>
-            <a:spLocks noGrp="1"/>
-          </p:cNvSpPr>
-          <p:nvPr>
-            <p:ph type="ftr" sz="quarter" idx="4"/>
-          </p:nvPr>
-        </p:nvSpPr>
-        <p:spPr>
-          <a:xfrm>
-            <a:off x="0" y="8685213"/>
-            <a:ext cx="2971800" cy="458787"/>
-          </a:xfrm>
-          <a:prstGeom prst="rect">
-            <a:avLst/>
-          </a:prstGeom>
-        </p:spPr>
-        <p:txBody>
-          <a:bodyPr vert="horz" lIns="91440" tIns="45720" rIns="91440" bIns="45720" rtlCol="0" anchor="b"/>
-          <a:lstStyle>
-            <a:lvl1pPr algn="l">
-              <a:defRPr sz="1200"/>
-            </a:lvl1pPr>
-          </a:lstStyle>
-          <a:p>
-            <a:endParaRPr lang="en-US"/>
-          </a:p>
-        </p:txBody>
-      </p:sp>
-      <p:sp>
-        <p:nvSpPr>
-          <p:cNvPr id="7" name="Slide Number Placeholder 6"/>
-          <p:cNvSpPr>
-            <a:spLocks noGrp="1"/>
-          </p:cNvSpPr>
-          <p:nvPr>
-            <p:ph type="sldNum" sz="quarter" idx="5"/>
-          </p:nvPr>
-        </p:nvSpPr>
-        <p:spPr>
-          <a:xfrm>
-            <a:off x="3884613" y="8685213"/>
-            <a:ext cx="2971800" cy="458787"/>
-          </a:xfrm>
-          <a:prstGeom prst="rect">
-            <a:avLst/>
-          </a:prstGeom>
-        </p:spPr>
-        <p:txBody>
-          <a:bodyPr vert="horz" lIns="91440" tIns="45720" rIns="91440" bIns="45720" rtlCol="0" anchor="b"/>
-          <a:lstStyle>
-            <a:lvl1pPr algn="r">
-              <a:defRPr sz="1200"/>
-            </a:lvl1pPr>
-          </a:lstStyle>
-          <a:p>
-            <a:fld id="{CE5E9CC1-C706-0F49-92D6-E571CC5EEA8F}" type="slidenum">
-              <a:rPr lang="en-US"/>
-              <a:t>‹#›</a:t>
-            </a:fld>
-            <a:endParaRPr lang="en-US"/>
-          </a:p>
-        </p:txBody>
-      </p:sp>
     </p:spTree>
     <p:extLst>
       <p:ext uri="{BB962C8B-B14F-4D97-AF65-F5344CB8AC3E}">
-        <p14:creationId xmlns:p14="http://schemas.microsoft.com/office/powerpoint/2010/main" val="1024086991"/>
+        <p14:creationId xmlns:p14="http://schemas.microsoft.com/office/powerpoint/2010/main" val="2846643653"/>
       </p:ext>
     </p:extLst>
   </p:cSld>
@@ -513,10 +294,6 @@
           <a:bodyPr/>
           <a:lstStyle/>
           <a:p>
-            <a:r>
-              <a:rPr lang="en-US" dirty="0"/>
-              <a:t/>
-            </a:r>
             <a:endParaRPr lang="en-US" dirty="0"/>
           </a:p>
         </p:txBody>
@@ -601,10 +378,6 @@
           <a:bodyPr/>
           <a:lstStyle/>
           <a:p>
-            <a:r>
-              <a:rPr lang="en-US" dirty="0"/>
-              <a:t/>
-            </a:r>
             <a:endParaRPr lang="en-US" dirty="0"/>
           </a:p>
         </p:txBody>
@@ -689,10 +462,6 @@
           <a:bodyPr/>
           <a:lstStyle/>
           <a:p>
-            <a:r>
-              <a:rPr lang="en-US" dirty="0"/>
-              <a:t/>
-            </a:r>
             <a:endParaRPr lang="en-US" dirty="0"/>
           </a:p>
         </p:txBody>
@@ -777,10 +546,6 @@
           <a:bodyPr/>
           <a:lstStyle/>
           <a:p>
-            <a:r>
-              <a:rPr lang="en-US" dirty="0"/>
-              <a:t/>
-            </a:r>
             <a:endParaRPr lang="en-US" dirty="0"/>
           </a:p>
         </p:txBody>
@@ -865,10 +630,6 @@
           <a:bodyPr/>
           <a:lstStyle/>
           <a:p>
-            <a:r>
-              <a:rPr lang="en-US" dirty="0"/>
-              <a:t/>
-            </a:r>
             <a:endParaRPr lang="en-US" dirty="0"/>
           </a:p>
         </p:txBody>
@@ -953,10 +714,6 @@
           <a:bodyPr/>
           <a:lstStyle/>
           <a:p>
-            <a:r>
-              <a:rPr lang="en-US" dirty="0"/>
-              <a:t/>
-            </a:r>
             <a:endParaRPr lang="en-US" dirty="0"/>
           </a:p>
         </p:txBody>
@@ -1041,10 +798,6 @@
           <a:bodyPr/>
           <a:lstStyle/>
           <a:p>
-            <a:r>
-              <a:rPr lang="en-US" dirty="0"/>
-              <a:t/>
-            </a:r>
             <a:endParaRPr lang="en-US" dirty="0"/>
           </a:p>
         </p:txBody>
@@ -1129,10 +882,6 @@
           <a:bodyPr/>
           <a:lstStyle/>
           <a:p>
-            <a:r>
-              <a:rPr lang="en-US" dirty="0"/>
-              <a:t/>
-            </a:r>
             <a:endParaRPr lang="en-US" dirty="0"/>
           </a:p>
         </p:txBody>
@@ -1217,10 +966,6 @@
           <a:bodyPr/>
           <a:lstStyle/>
           <a:p>
-            <a:r>
-              <a:rPr lang="en-US" dirty="0"/>
-              <a:t/>
-            </a:r>
             <a:endParaRPr lang="en-US" dirty="0"/>
           </a:p>
         </p:txBody>
@@ -1305,10 +1050,6 @@
           <a:bodyPr/>
           <a:lstStyle/>
           <a:p>
-            <a:r>
-              <a:rPr lang="en-US" dirty="0"/>
-              <a:t/>
-            </a:r>
             <a:endParaRPr lang="en-US" dirty="0"/>
           </a:p>
         </p:txBody>
@@ -1393,10 +1134,6 @@
           <a:bodyPr/>
           <a:lstStyle/>
           <a:p>
-            <a:r>
-              <a:rPr lang="en-US" dirty="0"/>
-              <a:t/>
-            </a:r>
             <a:endParaRPr lang="en-US" dirty="0"/>
           </a:p>
         </p:txBody>
@@ -1481,10 +1218,6 @@
           <a:bodyPr/>
           <a:lstStyle/>
           <a:p>
-            <a:r>
-              <a:rPr lang="en-US" dirty="0"/>
-              <a:t/>
-            </a:r>
             <a:endParaRPr lang="en-US" dirty="0"/>
           </a:p>
         </p:txBody>
@@ -1569,10 +1302,6 @@
           <a:bodyPr/>
           <a:lstStyle/>
           <a:p>
-            <a:r>
-              <a:rPr lang="en-US" dirty="0"/>
-              <a:t/>
-            </a:r>
             <a:endParaRPr lang="en-US" dirty="0"/>
           </a:p>
         </p:txBody>
@@ -1657,10 +1386,6 @@
           <a:bodyPr/>
           <a:lstStyle/>
           <a:p>
-            <a:r>
-              <a:rPr lang="en-US" dirty="0"/>
-              <a:t/>
-            </a:r>
             <a:endParaRPr lang="en-US" dirty="0"/>
           </a:p>
         </p:txBody>
@@ -1734,6 +1459,11 @@
 <file path=ppt/slideMasters/slideMaster1.xml><?xml version="1.0" encoding="utf-8"?>
 <p:sldMaster xmlns:a="http://schemas.openxmlformats.org/drawingml/2006/main" xmlns:r="http://schemas.openxmlformats.org/officeDocument/2006/relationships" xmlns:p="http://schemas.openxmlformats.org/presentationml/2006/main">
   <p:cSld>
+    <p:bg>
+      <p:bgRef idx="1001">
+        <a:schemeClr val="bg1"/>
+      </p:bgRef>
+    </p:bg>
     <p:spTree>
       <p:nvGrpSpPr>
         <p:cNvPr id="1" name=""/>
@@ -2016,6 +1746,7 @@
         <a:solidFill>
           <a:srgbClr val="06080D"/>
         </a:solidFill>
+        <a:effectLst/>
       </p:bgPr>
     </p:bg>
     <p:spTree>
@@ -2051,6 +1782,13 @@
           </a:solidFill>
           <a:ln/>
         </p:spPr>
+        <p:txBody>
+          <a:bodyPr/>
+          <a:lstStyle/>
+          <a:p>
+            <a:endParaRPr lang="en-US"/>
+          </a:p>
+        </p:txBody>
       </p:sp>
       <p:sp>
         <p:nvSpPr>
@@ -2071,6 +1809,13 @@
           </a:solidFill>
           <a:ln/>
         </p:spPr>
+        <p:txBody>
+          <a:bodyPr/>
+          <a:lstStyle/>
+          <a:p>
+            <a:endParaRPr lang="en-US"/>
+          </a:p>
+        </p:txBody>
       </p:sp>
       <p:sp>
         <p:nvSpPr>
@@ -2093,7 +1838,7 @@
           <a:bodyPr wrap="square" lIns="0" tIns="0" rIns="0" bIns="0" rtlCol="0" anchor="ctr"/>
           <a:lstStyle/>
           <a:p>
-            <a:pPr indent="0" marL="0">
+            <a:pPr marL="0" indent="0">
               <a:buNone/>
             </a:pPr>
             <a:r>
@@ -2132,7 +1877,7 @@
           <a:bodyPr wrap="square" lIns="0" tIns="0" rIns="0" bIns="0" rtlCol="0" anchor="ctr"/>
           <a:lstStyle/>
           <a:p>
-            <a:pPr indent="0" marL="0">
+            <a:pPr marL="0" indent="0">
               <a:buNone/>
             </a:pPr>
             <a:r>
@@ -2171,7 +1916,7 @@
           <a:bodyPr wrap="square" lIns="0" tIns="0" rIns="0" bIns="0" rtlCol="0" anchor="ctr"/>
           <a:lstStyle/>
           <a:p>
-            <a:pPr indent="0" marL="0">
+            <a:pPr marL="0" indent="0">
               <a:buNone/>
             </a:pPr>
             <a:r>
@@ -2210,7 +1955,7 @@
           <a:bodyPr wrap="square" lIns="0" tIns="0" rIns="0" bIns="0" rtlCol="0" anchor="ctr"/>
           <a:lstStyle/>
           <a:p>
-            <a:pPr indent="0" marL="0">
+            <a:pPr marL="0" indent="0">
               <a:buNone/>
             </a:pPr>
             <a:r>
@@ -2244,6 +1989,7 @@
         <a:solidFill>
           <a:srgbClr val="06080D"/>
         </a:solidFill>
+        <a:effectLst/>
       </p:bgPr>
     </p:bg>
     <p:spTree>
@@ -2281,7 +2027,7 @@
           <a:bodyPr wrap="square" lIns="0" tIns="0" rIns="0" bIns="0" rtlCol="0" anchor="ctr"/>
           <a:lstStyle/>
           <a:p>
-            <a:pPr indent="0" marL="0">
+            <a:pPr marL="0" indent="0">
               <a:buNone/>
             </a:pPr>
             <a:r>
@@ -2318,6 +2064,13 @@
           </a:solidFill>
           <a:ln/>
         </p:spPr>
+        <p:txBody>
+          <a:bodyPr/>
+          <a:lstStyle/>
+          <a:p>
+            <a:endParaRPr lang="en-US"/>
+          </a:p>
+        </p:txBody>
       </p:sp>
       <p:sp>
         <p:nvSpPr>
@@ -2340,7 +2093,7 @@
           <a:bodyPr wrap="square" lIns="0" tIns="0" rIns="0" bIns="0" rtlCol="0" anchor="ctr"/>
           <a:lstStyle/>
           <a:p>
-            <a:pPr algn="ctr" indent="0" marL="0">
+            <a:pPr marL="0" indent="0" algn="ctr">
               <a:buNone/>
             </a:pPr>
             <a:r>
@@ -2379,7 +2132,7 @@
           <a:bodyPr wrap="square" lIns="0" tIns="0" rIns="0" bIns="0" rtlCol="0" anchor="ctr"/>
           <a:lstStyle/>
           <a:p>
-            <a:pPr indent="0" marL="0">
+            <a:pPr marL="0" indent="0">
               <a:buNone/>
             </a:pPr>
             <a:r>
@@ -2416,6 +2169,13 @@
           </a:solidFill>
           <a:ln/>
         </p:spPr>
+        <p:txBody>
+          <a:bodyPr/>
+          <a:lstStyle/>
+          <a:p>
+            <a:endParaRPr lang="en-US"/>
+          </a:p>
+        </p:txBody>
       </p:sp>
       <p:sp>
         <p:nvSpPr>
@@ -2438,7 +2198,7 @@
           <a:bodyPr wrap="square" lIns="0" tIns="0" rIns="0" bIns="0" rtlCol="0" anchor="ctr"/>
           <a:lstStyle/>
           <a:p>
-            <a:pPr algn="ctr" indent="0" marL="0">
+            <a:pPr marL="0" indent="0" algn="ctr">
               <a:buNone/>
             </a:pPr>
             <a:r>
@@ -2477,7 +2237,7 @@
           <a:bodyPr wrap="square" lIns="0" tIns="0" rIns="0" bIns="0" rtlCol="0" anchor="ctr"/>
           <a:lstStyle/>
           <a:p>
-            <a:pPr indent="0" marL="0">
+            <a:pPr marL="0" indent="0">
               <a:buNone/>
             </a:pPr>
             <a:r>
@@ -2514,6 +2274,13 @@
           </a:solidFill>
           <a:ln/>
         </p:spPr>
+        <p:txBody>
+          <a:bodyPr/>
+          <a:lstStyle/>
+          <a:p>
+            <a:endParaRPr lang="en-US"/>
+          </a:p>
+        </p:txBody>
       </p:sp>
       <p:sp>
         <p:nvSpPr>
@@ -2536,7 +2303,7 @@
           <a:bodyPr wrap="square" lIns="0" tIns="0" rIns="0" bIns="0" rtlCol="0" anchor="ctr"/>
           <a:lstStyle/>
           <a:p>
-            <a:pPr algn="ctr" indent="0" marL="0">
+            <a:pPr marL="0" indent="0" algn="ctr">
               <a:buNone/>
             </a:pPr>
             <a:r>
@@ -2575,7 +2342,7 @@
           <a:bodyPr wrap="square" lIns="0" tIns="0" rIns="0" bIns="0" rtlCol="0" anchor="ctr"/>
           <a:lstStyle/>
           <a:p>
-            <a:pPr indent="0" marL="0">
+            <a:pPr marL="0" indent="0">
               <a:buNone/>
             </a:pPr>
             <a:r>
@@ -2612,6 +2379,13 @@
           </a:solidFill>
           <a:ln/>
         </p:spPr>
+        <p:txBody>
+          <a:bodyPr/>
+          <a:lstStyle/>
+          <a:p>
+            <a:endParaRPr lang="en-US"/>
+          </a:p>
+        </p:txBody>
       </p:sp>
       <p:sp>
         <p:nvSpPr>
@@ -2634,7 +2408,7 @@
           <a:bodyPr wrap="square" lIns="0" tIns="0" rIns="0" bIns="0" rtlCol="0" anchor="ctr"/>
           <a:lstStyle/>
           <a:p>
-            <a:pPr algn="ctr" indent="0" marL="0">
+            <a:pPr marL="0" indent="0" algn="ctr">
               <a:buNone/>
             </a:pPr>
             <a:r>
@@ -2673,7 +2447,7 @@
           <a:bodyPr wrap="square" lIns="0" tIns="0" rIns="0" bIns="0" rtlCol="0" anchor="ctr"/>
           <a:lstStyle/>
           <a:p>
-            <a:pPr indent="0" marL="0">
+            <a:pPr marL="0" indent="0">
               <a:buNone/>
             </a:pPr>
             <a:r>
@@ -2710,6 +2484,13 @@
           </a:solidFill>
           <a:ln/>
         </p:spPr>
+        <p:txBody>
+          <a:bodyPr/>
+          <a:lstStyle/>
+          <a:p>
+            <a:endParaRPr lang="en-US"/>
+          </a:p>
+        </p:txBody>
       </p:sp>
       <p:sp>
         <p:nvSpPr>
@@ -2732,7 +2513,7 @@
           <a:bodyPr wrap="square" lIns="0" tIns="0" rIns="0" bIns="0" rtlCol="0" anchor="ctr"/>
           <a:lstStyle/>
           <a:p>
-            <a:pPr algn="ctr" indent="0" marL="0">
+            <a:pPr marL="0" indent="0" algn="ctr">
               <a:buNone/>
             </a:pPr>
             <a:r>
@@ -2771,7 +2552,7 @@
           <a:bodyPr wrap="square" lIns="0" tIns="0" rIns="0" bIns="0" rtlCol="0" anchor="ctr"/>
           <a:lstStyle/>
           <a:p>
-            <a:pPr indent="0" marL="0">
+            <a:pPr marL="0" indent="0">
               <a:buNone/>
             </a:pPr>
             <a:r>
@@ -2808,6 +2589,13 @@
           </a:solidFill>
           <a:ln/>
         </p:spPr>
+        <p:txBody>
+          <a:bodyPr/>
+          <a:lstStyle/>
+          <a:p>
+            <a:endParaRPr lang="en-US"/>
+          </a:p>
+        </p:txBody>
       </p:sp>
       <p:sp>
         <p:nvSpPr>
@@ -2830,7 +2618,7 @@
           <a:bodyPr wrap="square" lIns="0" tIns="0" rIns="0" bIns="0" rtlCol="0" anchor="ctr"/>
           <a:lstStyle/>
           <a:p>
-            <a:pPr algn="ctr" indent="0" marL="0">
+            <a:pPr marL="0" indent="0" algn="ctr">
               <a:buNone/>
             </a:pPr>
             <a:r>
@@ -2869,7 +2657,7 @@
           <a:bodyPr wrap="square" lIns="0" tIns="0" rIns="0" bIns="0" rtlCol="0" anchor="ctr"/>
           <a:lstStyle/>
           <a:p>
-            <a:pPr indent="0" marL="0">
+            <a:pPr marL="0" indent="0">
               <a:buNone/>
             </a:pPr>
             <a:r>
@@ -2906,6 +2694,13 @@
           </a:solidFill>
           <a:ln/>
         </p:spPr>
+        <p:txBody>
+          <a:bodyPr/>
+          <a:lstStyle/>
+          <a:p>
+            <a:endParaRPr lang="en-US"/>
+          </a:p>
+        </p:txBody>
       </p:sp>
       <p:sp>
         <p:nvSpPr>
@@ -2928,7 +2723,7 @@
           <a:bodyPr wrap="square" lIns="0" tIns="0" rIns="0" bIns="0" rtlCol="0" anchor="ctr"/>
           <a:lstStyle/>
           <a:p>
-            <a:pPr algn="ctr" indent="0" marL="0">
+            <a:pPr marL="0" indent="0" algn="ctr">
               <a:buNone/>
             </a:pPr>
             <a:r>
@@ -2967,7 +2762,7 @@
           <a:bodyPr wrap="square" lIns="0" tIns="0" rIns="0" bIns="0" rtlCol="0" anchor="ctr"/>
           <a:lstStyle/>
           <a:p>
-            <a:pPr indent="0" marL="0">
+            <a:pPr marL="0" indent="0">
               <a:buNone/>
             </a:pPr>
             <a:r>
@@ -3006,7 +2801,7 @@
           <a:bodyPr wrap="square" rtlCol="0" anchor="ctr"/>
           <a:lstStyle/>
           <a:p>
-            <a:pPr algn="r" indent="0" marL="0">
+            <a:pPr marL="0" indent="0" algn="r">
               <a:buNone/>
             </a:pPr>
             <a:r>
@@ -3037,6 +2832,7 @@
         <a:solidFill>
           <a:srgbClr val="06080D"/>
         </a:solidFill>
+        <a:effectLst/>
       </p:bgPr>
     </p:bg>
     <p:spTree>
@@ -3074,7 +2870,7 @@
           <a:bodyPr wrap="square" lIns="0" tIns="0" rIns="0" bIns="0" rtlCol="0" anchor="ctr"/>
           <a:lstStyle/>
           <a:p>
-            <a:pPr indent="0" marL="0">
+            <a:pPr marL="0" indent="0">
               <a:buNone/>
             </a:pPr>
             <a:r>
@@ -3116,6 +2912,13 @@
             <a:prstDash val="solid"/>
           </a:ln>
         </p:spPr>
+        <p:txBody>
+          <a:bodyPr/>
+          <a:lstStyle/>
+          <a:p>
+            <a:endParaRPr lang="en-US"/>
+          </a:p>
+        </p:txBody>
       </p:sp>
       <p:sp>
         <p:nvSpPr>
@@ -3138,7 +2941,7 @@
           <a:bodyPr wrap="square" lIns="0" tIns="0" rIns="0" bIns="0" rtlCol="0" anchor="ctr"/>
           <a:lstStyle/>
           <a:p>
-            <a:pPr algn="ctr" indent="0" marL="0">
+            <a:pPr marL="0" indent="0" algn="ctr">
               <a:buNone/>
             </a:pPr>
             <a:r>
@@ -3177,7 +2980,7 @@
           <a:bodyPr wrap="square" lIns="0" tIns="0" rIns="0" bIns="0" rtlCol="0" anchor="ctr"/>
           <a:lstStyle/>
           <a:p>
-            <a:pPr algn="ctr" indent="0" marL="0">
+            <a:pPr marL="0" indent="0" algn="ctr">
               <a:buNone/>
             </a:pPr>
             <a:r>
@@ -3216,7 +3019,7 @@
           <a:bodyPr wrap="square" lIns="0" tIns="0" rIns="0" bIns="0" rtlCol="0" anchor="ctr"/>
           <a:lstStyle/>
           <a:p>
-            <a:pPr indent="0" marL="0">
+            <a:pPr marL="0" indent="0">
               <a:buNone/>
             </a:pPr>
             <a:r>
@@ -3258,6 +3061,13 @@
             <a:prstDash val="solid"/>
           </a:ln>
         </p:spPr>
+        <p:txBody>
+          <a:bodyPr/>
+          <a:lstStyle/>
+          <a:p>
+            <a:endParaRPr lang="en-US"/>
+          </a:p>
+        </p:txBody>
       </p:sp>
       <p:sp>
         <p:nvSpPr>
@@ -3280,7 +3090,7 @@
           <a:bodyPr wrap="square" lIns="0" tIns="0" rIns="0" bIns="0" rtlCol="0" anchor="ctr"/>
           <a:lstStyle/>
           <a:p>
-            <a:pPr algn="ctr" indent="0" marL="0">
+            <a:pPr marL="0" indent="0" algn="ctr">
               <a:buNone/>
             </a:pPr>
             <a:r>
@@ -3319,7 +3129,7 @@
           <a:bodyPr wrap="square" lIns="0" tIns="0" rIns="0" bIns="0" rtlCol="0" anchor="ctr"/>
           <a:lstStyle/>
           <a:p>
-            <a:pPr algn="ctr" indent="0" marL="0">
+            <a:pPr marL="0" indent="0" algn="ctr">
               <a:buNone/>
             </a:pPr>
             <a:r>
@@ -3358,7 +3168,7 @@
           <a:bodyPr wrap="square" lIns="0" tIns="0" rIns="0" bIns="0" rtlCol="0" anchor="ctr"/>
           <a:lstStyle/>
           <a:p>
-            <a:pPr indent="0" marL="0">
+            <a:pPr marL="0" indent="0">
               <a:buNone/>
             </a:pPr>
             <a:r>
@@ -3400,6 +3210,13 @@
             <a:prstDash val="solid"/>
           </a:ln>
         </p:spPr>
+        <p:txBody>
+          <a:bodyPr/>
+          <a:lstStyle/>
+          <a:p>
+            <a:endParaRPr lang="en-US"/>
+          </a:p>
+        </p:txBody>
       </p:sp>
       <p:sp>
         <p:nvSpPr>
@@ -3422,7 +3239,7 @@
           <a:bodyPr wrap="square" lIns="0" tIns="0" rIns="0" bIns="0" rtlCol="0" anchor="ctr"/>
           <a:lstStyle/>
           <a:p>
-            <a:pPr algn="ctr" indent="0" marL="0">
+            <a:pPr marL="0" indent="0" algn="ctr">
               <a:buNone/>
             </a:pPr>
             <a:r>
@@ -3461,7 +3278,7 @@
           <a:bodyPr wrap="square" lIns="0" tIns="0" rIns="0" bIns="0" rtlCol="0" anchor="ctr"/>
           <a:lstStyle/>
           <a:p>
-            <a:pPr algn="ctr" indent="0" marL="0">
+            <a:pPr marL="0" indent="0" algn="ctr">
               <a:buNone/>
             </a:pPr>
             <a:r>
@@ -3500,7 +3317,7 @@
           <a:bodyPr wrap="square" lIns="0" tIns="0" rIns="0" bIns="0" rtlCol="0" anchor="ctr"/>
           <a:lstStyle/>
           <a:p>
-            <a:pPr indent="0" marL="0">
+            <a:pPr marL="0" indent="0">
               <a:buNone/>
             </a:pPr>
             <a:r>
@@ -3542,6 +3359,13 @@
             <a:prstDash val="solid"/>
           </a:ln>
         </p:spPr>
+        <p:txBody>
+          <a:bodyPr/>
+          <a:lstStyle/>
+          <a:p>
+            <a:endParaRPr lang="en-US"/>
+          </a:p>
+        </p:txBody>
       </p:sp>
       <p:sp>
         <p:nvSpPr>
@@ -3564,7 +3388,7 @@
           <a:bodyPr wrap="square" lIns="0" tIns="0" rIns="0" bIns="0" rtlCol="0" anchor="ctr"/>
           <a:lstStyle/>
           <a:p>
-            <a:pPr algn="ctr" indent="0" marL="0">
+            <a:pPr marL="0" indent="0" algn="ctr">
               <a:buNone/>
             </a:pPr>
             <a:r>
@@ -3603,7 +3427,7 @@
           <a:bodyPr wrap="square" lIns="0" tIns="0" rIns="0" bIns="0" rtlCol="0" anchor="ctr"/>
           <a:lstStyle/>
           <a:p>
-            <a:pPr algn="ctr" indent="0" marL="0">
+            <a:pPr marL="0" indent="0" algn="ctr">
               <a:buNone/>
             </a:pPr>
             <a:r>
@@ -3642,7 +3466,7 @@
           <a:bodyPr wrap="square" lIns="0" tIns="0" rIns="0" bIns="0" rtlCol="0" anchor="ctr"/>
           <a:lstStyle/>
           <a:p>
-            <a:pPr indent="0" marL="0">
+            <a:pPr marL="0" indent="0">
               <a:buNone/>
             </a:pPr>
             <a:r>
@@ -3681,7 +3505,7 @@
           <a:bodyPr wrap="square" rtlCol="0" anchor="ctr"/>
           <a:lstStyle/>
           <a:p>
-            <a:pPr algn="r" indent="0" marL="0">
+            <a:pPr marL="0" indent="0" algn="r">
               <a:buNone/>
             </a:pPr>
             <a:r>
@@ -3712,6 +3536,7 @@
         <a:solidFill>
           <a:srgbClr val="06080D"/>
         </a:solidFill>
+        <a:effectLst/>
       </p:bgPr>
     </p:bg>
     <p:spTree>
@@ -3749,7 +3574,7 @@
           <a:bodyPr wrap="square" lIns="0" tIns="0" rIns="0" bIns="0" rtlCol="0" anchor="ctr"/>
           <a:lstStyle/>
           <a:p>
-            <a:pPr indent="0" marL="0">
+            <a:pPr marL="0" indent="0">
               <a:buNone/>
             </a:pPr>
             <a:r>
@@ -3788,7 +3613,7 @@
           <a:bodyPr wrap="square" lIns="0" tIns="0" rIns="0" bIns="0" rtlCol="0" anchor="ctr"/>
           <a:lstStyle/>
           <a:p>
-            <a:pPr algn="ctr" indent="0" marL="0">
+            <a:pPr marL="0" indent="0" algn="ctr">
               <a:buNone/>
             </a:pPr>
             <a:r>
@@ -3824,7 +3649,7 @@
           <a:bodyPr wrap="square" lIns="0" tIns="0" rIns="0" bIns="0" rtlCol="0" anchor="ctr"/>
           <a:lstStyle/>
           <a:p>
-            <a:pPr indent="0" marL="0">
+            <a:pPr marL="0" indent="0">
               <a:buNone/>
             </a:pPr>
             <a:r>
@@ -3863,7 +3688,7 @@
           <a:bodyPr wrap="square" lIns="0" tIns="0" rIns="0" bIns="0" rtlCol="0" anchor="ctr"/>
           <a:lstStyle/>
           <a:p>
-            <a:pPr indent="0" marL="0">
+            <a:pPr marL="0" indent="0">
               <a:buNone/>
             </a:pPr>
             <a:r>
@@ -3902,7 +3727,7 @@
           <a:bodyPr wrap="square" lIns="0" tIns="0" rIns="0" bIns="0" rtlCol="0" anchor="ctr"/>
           <a:lstStyle/>
           <a:p>
-            <a:pPr algn="ctr" indent="0" marL="0">
+            <a:pPr marL="0" indent="0" algn="ctr">
               <a:buNone/>
             </a:pPr>
             <a:r>
@@ -3938,7 +3763,7 @@
           <a:bodyPr wrap="square" lIns="0" tIns="0" rIns="0" bIns="0" rtlCol="0" anchor="ctr"/>
           <a:lstStyle/>
           <a:p>
-            <a:pPr indent="0" marL="0">
+            <a:pPr marL="0" indent="0">
               <a:buNone/>
             </a:pPr>
             <a:r>
@@ -3977,7 +3802,7 @@
           <a:bodyPr wrap="square" lIns="0" tIns="0" rIns="0" bIns="0" rtlCol="0" anchor="ctr"/>
           <a:lstStyle/>
           <a:p>
-            <a:pPr indent="0" marL="0">
+            <a:pPr marL="0" indent="0">
               <a:buNone/>
             </a:pPr>
             <a:r>
@@ -3989,7 +3814,7 @@
                 <a:ea typeface="Calibri" pitchFamily="34" charset="-122"/>
                 <a:cs typeface="Calibri" pitchFamily="34" charset="-120"/>
               </a:rPr>
-              <a:t>verifyclaw.io — 86-test security scanner</a:t>
+              <a:t>verifyclaw.io — 25-test security scanner</a:t>
             </a:r>
             <a:endParaRPr lang="en-US" sz="1100" dirty="0"/>
           </a:p>
@@ -4016,7 +3841,7 @@
           <a:bodyPr wrap="square" lIns="0" tIns="0" rIns="0" bIns="0" rtlCol="0" anchor="ctr"/>
           <a:lstStyle/>
           <a:p>
-            <a:pPr algn="ctr" indent="0" marL="0">
+            <a:pPr marL="0" indent="0" algn="ctr">
               <a:buNone/>
             </a:pPr>
             <a:r>
@@ -4052,7 +3877,7 @@
           <a:bodyPr wrap="square" lIns="0" tIns="0" rIns="0" bIns="0" rtlCol="0" anchor="ctr"/>
           <a:lstStyle/>
           <a:p>
-            <a:pPr indent="0" marL="0">
+            <a:pPr marL="0" indent="0">
               <a:buNone/>
             </a:pPr>
             <a:r>
@@ -4091,7 +3916,7 @@
           <a:bodyPr wrap="square" lIns="0" tIns="0" rIns="0" bIns="0" rtlCol="0" anchor="ctr"/>
           <a:lstStyle/>
           <a:p>
-            <a:pPr indent="0" marL="0">
+            <a:pPr marL="0" indent="0">
               <a:buNone/>
             </a:pPr>
             <a:r>
@@ -4130,7 +3955,7 @@
           <a:bodyPr wrap="square" lIns="0" tIns="0" rIns="0" bIns="0" rtlCol="0" anchor="ctr"/>
           <a:lstStyle/>
           <a:p>
-            <a:pPr algn="ctr" indent="0" marL="0">
+            <a:pPr marL="0" indent="0" algn="ctr">
               <a:buNone/>
             </a:pPr>
             <a:r>
@@ -4166,7 +3991,7 @@
           <a:bodyPr wrap="square" lIns="0" tIns="0" rIns="0" bIns="0" rtlCol="0" anchor="ctr"/>
           <a:lstStyle/>
           <a:p>
-            <a:pPr indent="0" marL="0">
+            <a:pPr marL="0" indent="0">
               <a:buNone/>
             </a:pPr>
             <a:r>
@@ -4205,7 +4030,7 @@
           <a:bodyPr wrap="square" lIns="0" tIns="0" rIns="0" bIns="0" rtlCol="0" anchor="ctr"/>
           <a:lstStyle/>
           <a:p>
-            <a:pPr indent="0" marL="0">
+            <a:pPr marL="0" indent="0">
               <a:buNone/>
             </a:pPr>
             <a:r>
@@ -4244,7 +4069,7 @@
           <a:bodyPr wrap="square" lIns="0" tIns="0" rIns="0" bIns="0" rtlCol="0" anchor="ctr"/>
           <a:lstStyle/>
           <a:p>
-            <a:pPr algn="ctr" indent="0" marL="0">
+            <a:pPr marL="0" indent="0" algn="ctr">
               <a:buNone/>
             </a:pPr>
             <a:r>
@@ -4280,7 +4105,7 @@
           <a:bodyPr wrap="square" lIns="0" tIns="0" rIns="0" bIns="0" rtlCol="0" anchor="ctr"/>
           <a:lstStyle/>
           <a:p>
-            <a:pPr indent="0" marL="0">
+            <a:pPr marL="0" indent="0">
               <a:buNone/>
             </a:pPr>
             <a:r>
@@ -4319,7 +4144,7 @@
           <a:bodyPr wrap="square" lIns="0" tIns="0" rIns="0" bIns="0" rtlCol="0" anchor="ctr"/>
           <a:lstStyle/>
           <a:p>
-            <a:pPr indent="0" marL="0">
+            <a:pPr marL="0" indent="0">
               <a:buNone/>
             </a:pPr>
             <a:r>
@@ -4358,7 +4183,7 @@
           <a:bodyPr wrap="square" lIns="0" tIns="0" rIns="0" bIns="0" rtlCol="0" anchor="ctr"/>
           <a:lstStyle/>
           <a:p>
-            <a:pPr algn="ctr" indent="0" marL="0">
+            <a:pPr marL="0" indent="0" algn="ctr">
               <a:buNone/>
             </a:pPr>
             <a:r>
@@ -4394,7 +4219,7 @@
           <a:bodyPr wrap="square" lIns="0" tIns="0" rIns="0" bIns="0" rtlCol="0" anchor="ctr"/>
           <a:lstStyle/>
           <a:p>
-            <a:pPr indent="0" marL="0">
+            <a:pPr marL="0" indent="0">
               <a:buNone/>
             </a:pPr>
             <a:r>
@@ -4433,7 +4258,7 @@
           <a:bodyPr wrap="square" lIns="0" tIns="0" rIns="0" bIns="0" rtlCol="0" anchor="ctr"/>
           <a:lstStyle/>
           <a:p>
-            <a:pPr indent="0" marL="0">
+            <a:pPr marL="0" indent="0">
               <a:buNone/>
             </a:pPr>
             <a:r>
@@ -4472,7 +4297,7 @@
           <a:bodyPr wrap="square" lIns="0" tIns="0" rIns="0" bIns="0" rtlCol="0" anchor="ctr"/>
           <a:lstStyle/>
           <a:p>
-            <a:pPr algn="ctr" indent="0" marL="0">
+            <a:pPr marL="0" indent="0" algn="ctr">
               <a:buNone/>
             </a:pPr>
             <a:r>
@@ -4508,7 +4333,7 @@
           <a:bodyPr wrap="square" lIns="0" tIns="0" rIns="0" bIns="0" rtlCol="0" anchor="ctr"/>
           <a:lstStyle/>
           <a:p>
-            <a:pPr indent="0" marL="0">
+            <a:pPr marL="0" indent="0">
               <a:buNone/>
             </a:pPr>
             <a:r>
@@ -4547,7 +4372,7 @@
           <a:bodyPr wrap="square" lIns="0" tIns="0" rIns="0" bIns="0" rtlCol="0" anchor="ctr"/>
           <a:lstStyle/>
           <a:p>
-            <a:pPr indent="0" marL="0">
+            <a:pPr marL="0" indent="0">
               <a:buNone/>
             </a:pPr>
             <a:r>
@@ -4586,7 +4411,7 @@
           <a:bodyPr wrap="square" lIns="0" tIns="0" rIns="0" bIns="0" rtlCol="0" anchor="ctr"/>
           <a:lstStyle/>
           <a:p>
-            <a:pPr algn="ctr" indent="0" marL="0">
+            <a:pPr marL="0" indent="0" algn="ctr">
               <a:buNone/>
             </a:pPr>
             <a:r>
@@ -4622,7 +4447,7 @@
           <a:bodyPr wrap="square" lIns="0" tIns="0" rIns="0" bIns="0" rtlCol="0" anchor="ctr"/>
           <a:lstStyle/>
           <a:p>
-            <a:pPr indent="0" marL="0">
+            <a:pPr marL="0" indent="0">
               <a:buNone/>
             </a:pPr>
             <a:r>
@@ -4661,7 +4486,7 @@
           <a:bodyPr wrap="square" lIns="0" tIns="0" rIns="0" bIns="0" rtlCol="0" anchor="ctr"/>
           <a:lstStyle/>
           <a:p>
-            <a:pPr indent="0" marL="0">
+            <a:pPr marL="0" indent="0">
               <a:buNone/>
             </a:pPr>
             <a:r>
@@ -4700,7 +4525,7 @@
           <a:bodyPr wrap="square" rtlCol="0" anchor="ctr"/>
           <a:lstStyle/>
           <a:p>
-            <a:pPr algn="r" indent="0" marL="0">
+            <a:pPr marL="0" indent="0" algn="r">
               <a:buNone/>
             </a:pPr>
             <a:r>
@@ -4731,6 +4556,7 @@
         <a:solidFill>
           <a:srgbClr val="06080D"/>
         </a:solidFill>
+        <a:effectLst/>
       </p:bgPr>
     </p:bg>
     <p:spTree>
@@ -4768,7 +4594,7 @@
           <a:bodyPr wrap="square" lIns="0" tIns="0" rIns="0" bIns="0" rtlCol="0" anchor="ctr"/>
           <a:lstStyle/>
           <a:p>
-            <a:pPr indent="0" marL="0">
+            <a:pPr marL="0" indent="0">
               <a:buNone/>
             </a:pPr>
             <a:r>
@@ -4810,6 +4636,13 @@
             <a:prstDash val="solid"/>
           </a:ln>
         </p:spPr>
+        <p:txBody>
+          <a:bodyPr/>
+          <a:lstStyle/>
+          <a:p>
+            <a:endParaRPr lang="en-US"/>
+          </a:p>
+        </p:txBody>
       </p:sp>
       <p:sp>
         <p:nvSpPr>
@@ -4832,7 +4665,7 @@
           <a:bodyPr wrap="square" lIns="0" tIns="0" rIns="0" bIns="0" rtlCol="0" anchor="ctr"/>
           <a:lstStyle/>
           <a:p>
-            <a:pPr algn="ctr" indent="0" marL="0">
+            <a:pPr marL="0" indent="0" algn="ctr">
               <a:buNone/>
             </a:pPr>
             <a:r>
@@ -4871,7 +4704,7 @@
           <a:bodyPr wrap="square" lIns="0" tIns="0" rIns="0" bIns="0" rtlCol="0" anchor="ctr"/>
           <a:lstStyle/>
           <a:p>
-            <a:pPr algn="ctr" indent="0" marL="0">
+            <a:pPr marL="0" indent="0" algn="ctr">
               <a:buNone/>
             </a:pPr>
             <a:r>
@@ -4908,6 +4741,13 @@
           </a:solidFill>
           <a:ln/>
         </p:spPr>
+        <p:txBody>
+          <a:bodyPr/>
+          <a:lstStyle/>
+          <a:p>
+            <a:endParaRPr lang="en-US"/>
+          </a:p>
+        </p:txBody>
       </p:sp>
       <p:sp>
         <p:nvSpPr>
@@ -4930,7 +4770,7 @@
           <a:bodyPr wrap="square" lIns="0" tIns="0" rIns="0" bIns="0" rtlCol="0" anchor="ctr"/>
           <a:lstStyle/>
           <a:p>
-            <a:pPr algn="ctr" indent="0" marL="0">
+            <a:pPr marL="0" indent="0" algn="ctr">
               <a:buNone/>
             </a:pPr>
             <a:r>
@@ -4969,7 +4809,7 @@
           <a:bodyPr wrap="square" lIns="0" tIns="0" rIns="0" bIns="0" rtlCol="0" anchor="ctr"/>
           <a:lstStyle/>
           <a:p>
-            <a:pPr indent="0" marL="0">
+            <a:pPr marL="0" indent="0">
               <a:buNone/>
             </a:pPr>
             <a:r>
@@ -5008,7 +4848,7 @@
           <a:bodyPr wrap="square" lIns="0" tIns="0" rIns="0" bIns="0" rtlCol="0" anchor="ctr"/>
           <a:lstStyle/>
           <a:p>
-            <a:pPr indent="0" marL="0">
+            <a:pPr marL="0" indent="0">
               <a:buNone/>
             </a:pPr>
             <a:r>
@@ -5045,6 +4885,13 @@
           </a:solidFill>
           <a:ln/>
         </p:spPr>
+        <p:txBody>
+          <a:bodyPr/>
+          <a:lstStyle/>
+          <a:p>
+            <a:endParaRPr lang="en-US"/>
+          </a:p>
+        </p:txBody>
       </p:sp>
       <p:sp>
         <p:nvSpPr>
@@ -5067,7 +4914,7 @@
           <a:bodyPr wrap="square" lIns="0" tIns="0" rIns="0" bIns="0" rtlCol="0" anchor="ctr"/>
           <a:lstStyle/>
           <a:p>
-            <a:pPr algn="ctr" indent="0" marL="0">
+            <a:pPr marL="0" indent="0" algn="ctr">
               <a:buNone/>
             </a:pPr>
             <a:r>
@@ -5106,7 +4953,7 @@
           <a:bodyPr wrap="square" lIns="0" tIns="0" rIns="0" bIns="0" rtlCol="0" anchor="ctr"/>
           <a:lstStyle/>
           <a:p>
-            <a:pPr indent="0" marL="0">
+            <a:pPr marL="0" indent="0">
               <a:buNone/>
             </a:pPr>
             <a:r>
@@ -5145,7 +4992,7 @@
           <a:bodyPr wrap="square" lIns="0" tIns="0" rIns="0" bIns="0" rtlCol="0" anchor="ctr"/>
           <a:lstStyle/>
           <a:p>
-            <a:pPr indent="0" marL="0">
+            <a:pPr marL="0" indent="0">
               <a:buNone/>
             </a:pPr>
             <a:r>
@@ -5182,6 +5029,13 @@
           </a:solidFill>
           <a:ln/>
         </p:spPr>
+        <p:txBody>
+          <a:bodyPr/>
+          <a:lstStyle/>
+          <a:p>
+            <a:endParaRPr lang="en-US"/>
+          </a:p>
+        </p:txBody>
       </p:sp>
       <p:sp>
         <p:nvSpPr>
@@ -5204,7 +5058,7 @@
           <a:bodyPr wrap="square" lIns="0" tIns="0" rIns="0" bIns="0" rtlCol="0" anchor="ctr"/>
           <a:lstStyle/>
           <a:p>
-            <a:pPr algn="ctr" indent="0" marL="0">
+            <a:pPr marL="0" indent="0" algn="ctr">
               <a:buNone/>
             </a:pPr>
             <a:r>
@@ -5243,7 +5097,7 @@
           <a:bodyPr wrap="square" lIns="0" tIns="0" rIns="0" bIns="0" rtlCol="0" anchor="ctr"/>
           <a:lstStyle/>
           <a:p>
-            <a:pPr indent="0" marL="0">
+            <a:pPr marL="0" indent="0">
               <a:buNone/>
             </a:pPr>
             <a:r>
@@ -5282,7 +5136,7 @@
           <a:bodyPr wrap="square" lIns="0" tIns="0" rIns="0" bIns="0" rtlCol="0" anchor="ctr"/>
           <a:lstStyle/>
           <a:p>
-            <a:pPr indent="0" marL="0">
+            <a:pPr marL="0" indent="0">
               <a:buNone/>
             </a:pPr>
             <a:r>
@@ -5319,6 +5173,13 @@
           </a:solidFill>
           <a:ln/>
         </p:spPr>
+        <p:txBody>
+          <a:bodyPr/>
+          <a:lstStyle/>
+          <a:p>
+            <a:endParaRPr lang="en-US"/>
+          </a:p>
+        </p:txBody>
       </p:sp>
       <p:sp>
         <p:nvSpPr>
@@ -5341,7 +5202,7 @@
           <a:bodyPr wrap="square" lIns="0" tIns="0" rIns="0" bIns="0" rtlCol="0" anchor="ctr"/>
           <a:lstStyle/>
           <a:p>
-            <a:pPr algn="ctr" indent="0" marL="0">
+            <a:pPr marL="0" indent="0" algn="ctr">
               <a:buNone/>
             </a:pPr>
             <a:r>
@@ -5380,7 +5241,7 @@
           <a:bodyPr wrap="square" lIns="0" tIns="0" rIns="0" bIns="0" rtlCol="0" anchor="ctr"/>
           <a:lstStyle/>
           <a:p>
-            <a:pPr indent="0" marL="0">
+            <a:pPr marL="0" indent="0">
               <a:buNone/>
             </a:pPr>
             <a:r>
@@ -5419,7 +5280,7 @@
           <a:bodyPr wrap="square" lIns="0" tIns="0" rIns="0" bIns="0" rtlCol="0" anchor="ctr"/>
           <a:lstStyle/>
           <a:p>
-            <a:pPr indent="0" marL="0">
+            <a:pPr marL="0" indent="0">
               <a:buNone/>
             </a:pPr>
             <a:r>
@@ -5458,7 +5319,7 @@
           <a:bodyPr wrap="square" rtlCol="0" anchor="ctr"/>
           <a:lstStyle/>
           <a:p>
-            <a:pPr algn="r" indent="0" marL="0">
+            <a:pPr marL="0" indent="0" algn="r">
               <a:buNone/>
             </a:pPr>
             <a:r>
@@ -5489,6 +5350,7 @@
         <a:solidFill>
           <a:srgbClr val="06080D"/>
         </a:solidFill>
+        <a:effectLst/>
       </p:bgPr>
     </p:bg>
     <p:spTree>
@@ -5524,6 +5386,13 @@
           </a:solidFill>
           <a:ln/>
         </p:spPr>
+        <p:txBody>
+          <a:bodyPr/>
+          <a:lstStyle/>
+          <a:p>
+            <a:endParaRPr lang="en-US"/>
+          </a:p>
+        </p:txBody>
       </p:sp>
       <p:sp>
         <p:nvSpPr>
@@ -5546,7 +5415,7 @@
           <a:bodyPr wrap="square" lIns="0" tIns="0" rIns="0" bIns="0" rtlCol="0" anchor="ctr"/>
           <a:lstStyle/>
           <a:p>
-            <a:pPr indent="0" marL="0">
+            <a:pPr marL="0" indent="0">
               <a:buNone/>
             </a:pPr>
             <a:r>
@@ -5585,7 +5454,7 @@
           <a:bodyPr wrap="square" lIns="0" tIns="0" rIns="0" bIns="0" rtlCol="0" anchor="ctr"/>
           <a:lstStyle/>
           <a:p>
-            <a:pPr indent="0" marL="0">
+            <a:pPr marL="0" indent="0">
               <a:buNone/>
             </a:pPr>
             <a:r>
@@ -5624,7 +5493,7 @@
           <a:bodyPr wrap="square" lIns="0" tIns="0" rIns="0" bIns="0" rtlCol="0" anchor="ctr"/>
           <a:lstStyle/>
           <a:p>
-            <a:pPr indent="0" marL="0">
+            <a:pPr marL="0" indent="0">
               <a:buNone/>
             </a:pPr>
             <a:r>
@@ -5636,7 +5505,7 @@
                 <a:ea typeface="Calibri" pitchFamily="34" charset="-122"/>
                 <a:cs typeface="Calibri" pitchFamily="34" charset="-120"/>
               </a:rPr>
-              <a:t>→  20+ years quantitative finance &amp; market microstructure</a:t>
+              <a:t>→  20+ years Software Engineering Experience </a:t>
             </a:r>
             <a:endParaRPr lang="en-US" sz="1200" dirty="0"/>
           </a:p>
@@ -5663,7 +5532,7 @@
           <a:bodyPr wrap="square" lIns="0" tIns="0" rIns="0" bIns="0" rtlCol="0" anchor="ctr"/>
           <a:lstStyle/>
           <a:p>
-            <a:pPr indent="0" marL="0">
+            <a:pPr marL="0" indent="0">
               <a:buNone/>
             </a:pPr>
             <a:r>
@@ -5675,7 +5544,7 @@
                 <a:ea typeface="Calibri" pitchFamily="34" charset="-122"/>
                 <a:cs typeface="Calibri" pitchFamily="34" charset="-120"/>
               </a:rPr>
-              <a:t>→  MSCS Santa Clara University, AI/Data Mining certificate Stanford</a:t>
+              <a:t>→  MSCS Santa Clara University, AI/Data Mining Graduate Certificate Stanford</a:t>
             </a:r>
             <a:endParaRPr lang="en-US" sz="1200" dirty="0"/>
           </a:p>
@@ -5702,7 +5571,7 @@
           <a:bodyPr wrap="square" lIns="0" tIns="0" rIns="0" bIns="0" rtlCol="0" anchor="ctr"/>
           <a:lstStyle/>
           <a:p>
-            <a:pPr indent="0" marL="0">
+            <a:pPr marL="0" indent="0">
               <a:buNone/>
             </a:pPr>
             <a:r>
@@ -5714,7 +5583,29 @@
                 <a:ea typeface="Calibri" pitchFamily="34" charset="-122"/>
                 <a:cs typeface="Calibri" pitchFamily="34" charset="-120"/>
               </a:rPr>
-              <a:t>→  Enterprise software: Oracle, TIBCO</a:t>
+              <a:t>→  Enterprise software: Oracle </a:t>
+            </a:r>
+            <a:r>
+              <a:rPr lang="en-US" sz="1200" dirty="0" err="1">
+                <a:solidFill>
+                  <a:srgbClr val="8B95A8"/>
+                </a:solidFill>
+                <a:latin typeface="Calibri" pitchFamily="34" charset="0"/>
+                <a:ea typeface="Calibri" pitchFamily="34" charset="-122"/>
+                <a:cs typeface="Calibri" pitchFamily="34" charset="-120"/>
+              </a:rPr>
+              <a:t>SoA</a:t>
+            </a:r>
+            <a:r>
+              <a:rPr lang="en-US" sz="1200" dirty="0">
+                <a:solidFill>
+                  <a:srgbClr val="8B95A8"/>
+                </a:solidFill>
+                <a:latin typeface="Calibri" pitchFamily="34" charset="0"/>
+                <a:ea typeface="Calibri" pitchFamily="34" charset="-122"/>
+                <a:cs typeface="Calibri" pitchFamily="34" charset="-120"/>
+              </a:rPr>
+              <a:t>, TIBCO Data grid products</a:t>
             </a:r>
             <a:endParaRPr lang="en-US" sz="1200" dirty="0"/>
           </a:p>
@@ -5741,7 +5632,7 @@
           <a:bodyPr wrap="square" lIns="0" tIns="0" rIns="0" bIns="0" rtlCol="0" anchor="ctr"/>
           <a:lstStyle/>
           <a:p>
-            <a:pPr indent="0" marL="0">
+            <a:pPr marL="0" indent="0">
               <a:buNone/>
             </a:pPr>
             <a:r>
@@ -5780,7 +5671,7 @@
           <a:bodyPr wrap="square" lIns="0" tIns="0" rIns="0" bIns="0" rtlCol="0" anchor="ctr"/>
           <a:lstStyle/>
           <a:p>
-            <a:pPr indent="0" marL="0">
+            <a:pPr marL="0" indent="0">
               <a:buNone/>
             </a:pPr>
             <a:r>
@@ -5792,7 +5683,18 @@
                 <a:ea typeface="Calibri" pitchFamily="34" charset="-122"/>
                 <a:cs typeface="Calibri" pitchFamily="34" charset="-120"/>
               </a:rPr>
-              <a:t>→  Deep expertise: VPIN, Kyle's Lambda, Hawkes Processes, MEV detection</a:t>
+              <a:t>→  Hands on experience  with Oracle SOA’s large scale, complex codebase used by thousands </a:t>
+            </a:r>
+            <a:r>
+              <a:rPr lang="en-US" sz="1200">
+                <a:solidFill>
+                  <a:srgbClr val="8B95A8"/>
+                </a:solidFill>
+                <a:latin typeface="Calibri" pitchFamily="34" charset="0"/>
+                <a:ea typeface="Calibri" pitchFamily="34" charset="-122"/>
+                <a:cs typeface="Calibri" pitchFamily="34" charset="-120"/>
+              </a:rPr>
+              <a:t>of customers.</a:t>
             </a:r>
             <a:endParaRPr lang="en-US" sz="1200" dirty="0"/>
           </a:p>
@@ -5819,7 +5721,7 @@
           <a:bodyPr wrap="square" lIns="0" tIns="0" rIns="0" bIns="0" rtlCol="0" anchor="ctr"/>
           <a:lstStyle/>
           <a:p>
-            <a:pPr indent="0" marL="0">
+            <a:pPr marL="0" indent="0">
               <a:buNone/>
             </a:pPr>
             <a:r>
@@ -5831,7 +5733,18 @@
                 <a:ea typeface="Calibri" pitchFamily="34" charset="-122"/>
                 <a:cs typeface="Calibri" pitchFamily="34" charset="-120"/>
               </a:rPr>
-              <a:t>forgeclaw.io  |  verifyclaw.io  |  vectorblock.io  |  adaboost.ai</a:t>
+              <a:t>forgeclaw.io  |  verifyclaw.io  |  vectorblock.io  |  </a:t>
+            </a:r>
+            <a:r>
+              <a:rPr lang="en-US" sz="1300" dirty="0" err="1">
+                <a:solidFill>
+                  <a:srgbClr val="F97316"/>
+                </a:solidFill>
+                <a:latin typeface="Calibri" pitchFamily="34" charset="0"/>
+                <a:ea typeface="Calibri" pitchFamily="34" charset="-122"/>
+                <a:cs typeface="Calibri" pitchFamily="34" charset="-120"/>
+              </a:rPr>
+              <a:t>adaboost</a:t>
             </a:r>
             <a:endParaRPr lang="en-US" sz="1300" dirty="0"/>
           </a:p>
@@ -5858,11 +5771,11 @@
           <a:bodyPr wrap="square" lIns="0" tIns="0" rIns="0" bIns="0" rtlCol="0" anchor="ctr"/>
           <a:lstStyle/>
           <a:p>
-            <a:pPr indent="0" marL="0">
-              <a:buNone/>
-            </a:pPr>
-            <a:r>
-              <a:rPr lang="en-US" sz="1200" dirty="0">
+            <a:pPr marL="0" indent="0">
+              <a:buNone/>
+            </a:pPr>
+            <a:r>
+              <a:rPr lang="en-US" sz="1200" dirty="0" err="1">
                 <a:solidFill>
                   <a:srgbClr val="8B95A8"/>
                 </a:solidFill>
@@ -5870,7 +5783,7 @@
                 <a:ea typeface="Calibri" pitchFamily="34" charset="-122"/>
                 <a:cs typeface="Calibri" pitchFamily="34" charset="-120"/>
               </a:rPr>
-              <a:t>suvasis@adaboostai.com</a:t>
+              <a:t>suvasism@adaboostai.com</a:t>
             </a:r>
             <a:endParaRPr lang="en-US" sz="1200" dirty="0"/>
           </a:p>
@@ -5897,7 +5810,7 @@
           <a:bodyPr wrap="square" rtlCol="0" anchor="ctr"/>
           <a:lstStyle/>
           <a:p>
-            <a:pPr algn="r" indent="0" marL="0">
+            <a:pPr marL="0" indent="0" algn="r">
               <a:buNone/>
             </a:pPr>
             <a:r>
@@ -5928,6 +5841,7 @@
         <a:solidFill>
           <a:srgbClr val="06080D"/>
         </a:solidFill>
+        <a:effectLst/>
       </p:bgPr>
     </p:bg>
     <p:spTree>
@@ -5965,7 +5879,7 @@
           <a:bodyPr wrap="square" lIns="0" tIns="0" rIns="0" bIns="0" rtlCol="0" anchor="ctr"/>
           <a:lstStyle/>
           <a:p>
-            <a:pPr indent="0" marL="0">
+            <a:pPr marL="0" indent="0">
               <a:buNone/>
             </a:pPr>
             <a:r>
@@ -6004,7 +5918,7 @@
           <a:bodyPr wrap="square" lIns="0" tIns="0" rIns="0" bIns="0" rtlCol="0" anchor="ctr"/>
           <a:lstStyle/>
           <a:p>
-            <a:pPr indent="0" marL="0">
+            <a:pPr marL="0" indent="0">
               <a:buNone/>
             </a:pPr>
             <a:r>
@@ -6046,6 +5960,13 @@
             <a:prstDash val="solid"/>
           </a:ln>
         </p:spPr>
+        <p:txBody>
+          <a:bodyPr/>
+          <a:lstStyle/>
+          <a:p>
+            <a:endParaRPr lang="en-US"/>
+          </a:p>
+        </p:txBody>
       </p:sp>
       <p:sp>
         <p:nvSpPr>
@@ -6068,7 +5989,7 @@
           <a:bodyPr wrap="square" lIns="0" tIns="0" rIns="0" bIns="0" rtlCol="0" anchor="ctr"/>
           <a:lstStyle/>
           <a:p>
-            <a:pPr indent="0" marL="0">
+            <a:pPr marL="0" indent="0">
               <a:buNone/>
             </a:pPr>
             <a:r>
@@ -6107,7 +6028,7 @@
           <a:bodyPr wrap="square" lIns="0" tIns="0" rIns="0" bIns="0" rtlCol="0" anchor="ctr"/>
           <a:lstStyle/>
           <a:p>
-            <a:pPr indent="0" marL="0">
+            <a:pPr marL="0" indent="0">
               <a:buNone/>
             </a:pPr>
             <a:r>
@@ -6146,7 +6067,7 @@
           <a:bodyPr wrap="square" lIns="0" tIns="0" rIns="0" bIns="0" rtlCol="0" anchor="ctr"/>
           <a:lstStyle/>
           <a:p>
-            <a:pPr indent="0" marL="0">
+            <a:pPr marL="0" indent="0">
               <a:buNone/>
             </a:pPr>
             <a:r>
@@ -6188,6 +6109,13 @@
             <a:prstDash val="solid"/>
           </a:ln>
         </p:spPr>
+        <p:txBody>
+          <a:bodyPr/>
+          <a:lstStyle/>
+          <a:p>
+            <a:endParaRPr lang="en-US"/>
+          </a:p>
+        </p:txBody>
       </p:sp>
       <p:sp>
         <p:nvSpPr>
@@ -6210,7 +6138,7 @@
           <a:bodyPr wrap="square" lIns="0" tIns="0" rIns="0" bIns="0" rtlCol="0" anchor="ctr"/>
           <a:lstStyle/>
           <a:p>
-            <a:pPr indent="0" marL="0">
+            <a:pPr marL="0" indent="0">
               <a:buNone/>
             </a:pPr>
             <a:r>
@@ -6249,7 +6177,7 @@
           <a:bodyPr wrap="square" lIns="0" tIns="0" rIns="0" bIns="0" rtlCol="0" anchor="ctr"/>
           <a:lstStyle/>
           <a:p>
-            <a:pPr indent="0" marL="0">
+            <a:pPr marL="0" indent="0">
               <a:buNone/>
             </a:pPr>
             <a:r>
@@ -6288,7 +6216,7 @@
           <a:bodyPr wrap="square" lIns="0" tIns="0" rIns="0" bIns="0" rtlCol="0" anchor="ctr"/>
           <a:lstStyle/>
           <a:p>
-            <a:pPr indent="0" marL="0">
+            <a:pPr marL="0" indent="0">
               <a:buNone/>
             </a:pPr>
             <a:r>
@@ -6330,6 +6258,13 @@
             <a:prstDash val="solid"/>
           </a:ln>
         </p:spPr>
+        <p:txBody>
+          <a:bodyPr/>
+          <a:lstStyle/>
+          <a:p>
+            <a:endParaRPr lang="en-US"/>
+          </a:p>
+        </p:txBody>
       </p:sp>
       <p:sp>
         <p:nvSpPr>
@@ -6352,7 +6287,7 @@
           <a:bodyPr wrap="square" lIns="0" tIns="0" rIns="0" bIns="0" rtlCol="0" anchor="ctr"/>
           <a:lstStyle/>
           <a:p>
-            <a:pPr indent="0" marL="0">
+            <a:pPr marL="0" indent="0">
               <a:buNone/>
             </a:pPr>
             <a:r>
@@ -6391,7 +6326,7 @@
           <a:bodyPr wrap="square" lIns="0" tIns="0" rIns="0" bIns="0" rtlCol="0" anchor="ctr"/>
           <a:lstStyle/>
           <a:p>
-            <a:pPr indent="0" marL="0">
+            <a:pPr marL="0" indent="0">
               <a:buNone/>
             </a:pPr>
             <a:r>
@@ -6430,7 +6365,7 @@
           <a:bodyPr wrap="square" lIns="0" tIns="0" rIns="0" bIns="0" rtlCol="0" anchor="ctr"/>
           <a:lstStyle/>
           <a:p>
-            <a:pPr indent="0" marL="0">
+            <a:pPr marL="0" indent="0">
               <a:buNone/>
             </a:pPr>
             <a:r>
@@ -6469,7 +6404,7 @@
           <a:bodyPr wrap="square" rtlCol="0" anchor="ctr"/>
           <a:lstStyle/>
           <a:p>
-            <a:pPr algn="r" indent="0" marL="0">
+            <a:pPr marL="0" indent="0" algn="r">
               <a:buNone/>
             </a:pPr>
             <a:r>
@@ -6500,6 +6435,7 @@
         <a:solidFill>
           <a:srgbClr val="06080D"/>
         </a:solidFill>
+        <a:effectLst/>
       </p:bgPr>
     </p:bg>
     <p:spTree>
@@ -6537,7 +6473,7 @@
           <a:bodyPr wrap="square" lIns="0" tIns="0" rIns="0" bIns="0" rtlCol="0" anchor="ctr"/>
           <a:lstStyle/>
           <a:p>
-            <a:pPr indent="0" marL="0">
+            <a:pPr marL="0" indent="0">
               <a:buNone/>
             </a:pPr>
             <a:r>
@@ -6576,7 +6512,7 @@
           <a:bodyPr wrap="square" lIns="0" tIns="0" rIns="0" bIns="0" rtlCol="0" anchor="ctr"/>
           <a:lstStyle/>
           <a:p>
-            <a:pPr indent="0" marL="0">
+            <a:pPr marL="0" indent="0">
               <a:buNone/>
             </a:pPr>
             <a:r>
@@ -6618,6 +6554,13 @@
             <a:prstDash val="solid"/>
           </a:ln>
         </p:spPr>
+        <p:txBody>
+          <a:bodyPr/>
+          <a:lstStyle/>
+          <a:p>
+            <a:endParaRPr lang="en-US"/>
+          </a:p>
+        </p:txBody>
       </p:sp>
       <p:sp>
         <p:nvSpPr>
@@ -6640,7 +6583,7 @@
           <a:bodyPr wrap="square" lIns="0" tIns="0" rIns="0" bIns="0" rtlCol="0" anchor="ctr"/>
           <a:lstStyle/>
           <a:p>
-            <a:pPr algn="ctr" indent="0" marL="0">
+            <a:pPr marL="0" indent="0" algn="ctr">
               <a:buNone/>
             </a:pPr>
             <a:r>
@@ -6676,7 +6619,7 @@
           <a:bodyPr wrap="square" lIns="0" tIns="0" rIns="0" bIns="0" rtlCol="0" anchor="ctr"/>
           <a:lstStyle/>
           <a:p>
-            <a:pPr algn="ctr" indent="0" marL="0">
+            <a:pPr marL="0" indent="0" algn="ctr">
               <a:buNone/>
             </a:pPr>
             <a:r>
@@ -6715,7 +6658,7 @@
           <a:bodyPr wrap="square" lIns="0" tIns="0" rIns="0" bIns="0" rtlCol="0" anchor="ctr"/>
           <a:lstStyle/>
           <a:p>
-            <a:pPr algn="ctr" indent="0" marL="0">
+            <a:pPr marL="0" indent="0" algn="ctr">
               <a:buNone/>
             </a:pPr>
             <a:r>
@@ -6754,7 +6697,7 @@
           <a:bodyPr wrap="square" lIns="0" tIns="0" rIns="0" bIns="0" rtlCol="0" anchor="ctr"/>
           <a:lstStyle/>
           <a:p>
-            <a:pPr algn="ctr" indent="0" marL="0">
+            <a:pPr marL="0" indent="0" algn="ctr">
               <a:buNone/>
             </a:pPr>
             <a:r>
@@ -6793,6 +6736,13 @@
             <a:prstDash val="solid"/>
           </a:ln>
         </p:spPr>
+        <p:txBody>
+          <a:bodyPr/>
+          <a:lstStyle/>
+          <a:p>
+            <a:endParaRPr lang="en-US"/>
+          </a:p>
+        </p:txBody>
       </p:sp>
       <p:sp>
         <p:nvSpPr>
@@ -6815,7 +6765,7 @@
           <a:bodyPr wrap="square" lIns="0" tIns="0" rIns="0" bIns="0" rtlCol="0" anchor="ctr"/>
           <a:lstStyle/>
           <a:p>
-            <a:pPr algn="ctr" indent="0" marL="0">
+            <a:pPr marL="0" indent="0" algn="ctr">
               <a:buNone/>
             </a:pPr>
             <a:r>
@@ -6851,7 +6801,7 @@
           <a:bodyPr wrap="square" lIns="0" tIns="0" rIns="0" bIns="0" rtlCol="0" anchor="ctr"/>
           <a:lstStyle/>
           <a:p>
-            <a:pPr algn="ctr" indent="0" marL="0">
+            <a:pPr marL="0" indent="0" algn="ctr">
               <a:buNone/>
             </a:pPr>
             <a:r>
@@ -6890,7 +6840,7 @@
           <a:bodyPr wrap="square" lIns="0" tIns="0" rIns="0" bIns="0" rtlCol="0" anchor="ctr"/>
           <a:lstStyle/>
           <a:p>
-            <a:pPr algn="ctr" indent="0" marL="0">
+            <a:pPr marL="0" indent="0" algn="ctr">
               <a:buNone/>
             </a:pPr>
             <a:r>
@@ -6929,7 +6879,7 @@
           <a:bodyPr wrap="square" lIns="0" tIns="0" rIns="0" bIns="0" rtlCol="0" anchor="ctr"/>
           <a:lstStyle/>
           <a:p>
-            <a:pPr algn="ctr" indent="0" marL="0">
+            <a:pPr marL="0" indent="0" algn="ctr">
               <a:buNone/>
             </a:pPr>
             <a:r>
@@ -6968,6 +6918,13 @@
             <a:prstDash val="solid"/>
           </a:ln>
         </p:spPr>
+        <p:txBody>
+          <a:bodyPr/>
+          <a:lstStyle/>
+          <a:p>
+            <a:endParaRPr lang="en-US"/>
+          </a:p>
+        </p:txBody>
       </p:sp>
       <p:sp>
         <p:nvSpPr>
@@ -6990,7 +6947,7 @@
           <a:bodyPr wrap="square" lIns="0" tIns="0" rIns="0" bIns="0" rtlCol="0" anchor="ctr"/>
           <a:lstStyle/>
           <a:p>
-            <a:pPr algn="ctr" indent="0" marL="0">
+            <a:pPr marL="0" indent="0" algn="ctr">
               <a:buNone/>
             </a:pPr>
             <a:r>
@@ -7026,7 +6983,7 @@
           <a:bodyPr wrap="square" lIns="0" tIns="0" rIns="0" bIns="0" rtlCol="0" anchor="ctr"/>
           <a:lstStyle/>
           <a:p>
-            <a:pPr algn="ctr" indent="0" marL="0">
+            <a:pPr marL="0" indent="0" algn="ctr">
               <a:buNone/>
             </a:pPr>
             <a:r>
@@ -7065,7 +7022,7 @@
           <a:bodyPr wrap="square" lIns="0" tIns="0" rIns="0" bIns="0" rtlCol="0" anchor="ctr"/>
           <a:lstStyle/>
           <a:p>
-            <a:pPr algn="ctr" indent="0" marL="0">
+            <a:pPr marL="0" indent="0" algn="ctr">
               <a:buNone/>
             </a:pPr>
             <a:r>
@@ -7104,7 +7061,7 @@
           <a:bodyPr wrap="square" lIns="0" tIns="0" rIns="0" bIns="0" rtlCol="0" anchor="ctr"/>
           <a:lstStyle/>
           <a:p>
-            <a:pPr algn="ctr" indent="0" marL="0">
+            <a:pPr marL="0" indent="0" algn="ctr">
               <a:buNone/>
             </a:pPr>
             <a:r>
@@ -7143,6 +7100,13 @@
             <a:prstDash val="solid"/>
           </a:ln>
         </p:spPr>
+        <p:txBody>
+          <a:bodyPr/>
+          <a:lstStyle/>
+          <a:p>
+            <a:endParaRPr lang="en-US"/>
+          </a:p>
+        </p:txBody>
       </p:sp>
       <p:sp>
         <p:nvSpPr>
@@ -7165,7 +7129,7 @@
           <a:bodyPr wrap="square" lIns="0" tIns="0" rIns="0" bIns="0" rtlCol="0" anchor="ctr"/>
           <a:lstStyle/>
           <a:p>
-            <a:pPr algn="ctr" indent="0" marL="0">
+            <a:pPr marL="0" indent="0" algn="ctr">
               <a:buNone/>
             </a:pPr>
             <a:r>
@@ -7201,7 +7165,7 @@
           <a:bodyPr wrap="square" lIns="0" tIns="0" rIns="0" bIns="0" rtlCol="0" anchor="ctr"/>
           <a:lstStyle/>
           <a:p>
-            <a:pPr algn="ctr" indent="0" marL="0">
+            <a:pPr marL="0" indent="0" algn="ctr">
               <a:buNone/>
             </a:pPr>
             <a:r>
@@ -7240,7 +7204,7 @@
           <a:bodyPr wrap="square" lIns="0" tIns="0" rIns="0" bIns="0" rtlCol="0" anchor="ctr"/>
           <a:lstStyle/>
           <a:p>
-            <a:pPr algn="ctr" indent="0" marL="0">
+            <a:pPr marL="0" indent="0" algn="ctr">
               <a:buNone/>
             </a:pPr>
             <a:r>
@@ -7279,7 +7243,7 @@
           <a:bodyPr wrap="square" rtlCol="0" anchor="ctr"/>
           <a:lstStyle/>
           <a:p>
-            <a:pPr algn="r" indent="0" marL="0">
+            <a:pPr marL="0" indent="0" algn="r">
               <a:buNone/>
             </a:pPr>
             <a:r>
@@ -7310,6 +7274,7 @@
         <a:solidFill>
           <a:srgbClr val="06080D"/>
         </a:solidFill>
+        <a:effectLst/>
       </p:bgPr>
     </p:bg>
     <p:spTree>
@@ -7347,7 +7312,7 @@
           <a:bodyPr wrap="square" lIns="0" tIns="0" rIns="0" bIns="0" rtlCol="0" anchor="ctr"/>
           <a:lstStyle/>
           <a:p>
-            <a:pPr indent="0" marL="0">
+            <a:pPr marL="0" indent="0">
               <a:buNone/>
             </a:pPr>
             <a:r>
@@ -7386,7 +7351,7 @@
           <a:bodyPr wrap="square" lIns="0" tIns="0" rIns="0" bIns="0" rtlCol="0" anchor="ctr"/>
           <a:lstStyle/>
           <a:p>
-            <a:pPr indent="0" marL="0">
+            <a:pPr marL="0" indent="0">
               <a:buNone/>
             </a:pPr>
             <a:r>
@@ -7428,6 +7393,13 @@
             <a:prstDash val="solid"/>
           </a:ln>
         </p:spPr>
+        <p:txBody>
+          <a:bodyPr/>
+          <a:lstStyle/>
+          <a:p>
+            <a:endParaRPr lang="en-US"/>
+          </a:p>
+        </p:txBody>
       </p:sp>
       <p:sp>
         <p:nvSpPr>
@@ -7450,7 +7422,7 @@
           <a:bodyPr wrap="square" lIns="0" tIns="0" rIns="0" bIns="0" rtlCol="0" anchor="ctr"/>
           <a:lstStyle/>
           <a:p>
-            <a:pPr algn="ctr" indent="0" marL="0">
+            <a:pPr marL="0" indent="0" algn="ctr">
               <a:buNone/>
             </a:pPr>
             <a:r>
@@ -7486,7 +7458,7 @@
           <a:bodyPr wrap="square" lIns="0" tIns="0" rIns="0" bIns="0" rtlCol="0" anchor="ctr"/>
           <a:lstStyle/>
           <a:p>
-            <a:pPr indent="0" marL="0">
+            <a:pPr marL="0" indent="0">
               <a:buNone/>
             </a:pPr>
             <a:r>
@@ -7525,7 +7497,7 @@
           <a:bodyPr wrap="square" lIns="0" tIns="0" rIns="0" bIns="0" rtlCol="0" anchor="ctr"/>
           <a:lstStyle/>
           <a:p>
-            <a:pPr indent="0" marL="0">
+            <a:pPr marL="0" indent="0">
               <a:buNone/>
             </a:pPr>
             <a:r>
@@ -7567,6 +7539,13 @@
             <a:prstDash val="solid"/>
           </a:ln>
         </p:spPr>
+        <p:txBody>
+          <a:bodyPr/>
+          <a:lstStyle/>
+          <a:p>
+            <a:endParaRPr lang="en-US"/>
+          </a:p>
+        </p:txBody>
       </p:sp>
       <p:sp>
         <p:nvSpPr>
@@ -7589,7 +7568,7 @@
           <a:bodyPr wrap="square" lIns="0" tIns="0" rIns="0" bIns="0" rtlCol="0" anchor="ctr"/>
           <a:lstStyle/>
           <a:p>
-            <a:pPr algn="ctr" indent="0" marL="0">
+            <a:pPr marL="0" indent="0" algn="ctr">
               <a:buNone/>
             </a:pPr>
             <a:r>
@@ -7625,7 +7604,7 @@
           <a:bodyPr wrap="square" lIns="0" tIns="0" rIns="0" bIns="0" rtlCol="0" anchor="ctr"/>
           <a:lstStyle/>
           <a:p>
-            <a:pPr indent="0" marL="0">
+            <a:pPr marL="0" indent="0">
               <a:buNone/>
             </a:pPr>
             <a:r>
@@ -7664,7 +7643,7 @@
           <a:bodyPr wrap="square" lIns="0" tIns="0" rIns="0" bIns="0" rtlCol="0" anchor="ctr"/>
           <a:lstStyle/>
           <a:p>
-            <a:pPr indent="0" marL="0">
+            <a:pPr marL="0" indent="0">
               <a:buNone/>
             </a:pPr>
             <a:r>
@@ -7706,6 +7685,13 @@
             <a:prstDash val="solid"/>
           </a:ln>
         </p:spPr>
+        <p:txBody>
+          <a:bodyPr/>
+          <a:lstStyle/>
+          <a:p>
+            <a:endParaRPr lang="en-US"/>
+          </a:p>
+        </p:txBody>
       </p:sp>
       <p:sp>
         <p:nvSpPr>
@@ -7728,7 +7714,7 @@
           <a:bodyPr wrap="square" lIns="0" tIns="0" rIns="0" bIns="0" rtlCol="0" anchor="ctr"/>
           <a:lstStyle/>
           <a:p>
-            <a:pPr algn="ctr" indent="0" marL="0">
+            <a:pPr marL="0" indent="0" algn="ctr">
               <a:buNone/>
             </a:pPr>
             <a:r>
@@ -7764,7 +7750,7 @@
           <a:bodyPr wrap="square" lIns="0" tIns="0" rIns="0" bIns="0" rtlCol="0" anchor="ctr"/>
           <a:lstStyle/>
           <a:p>
-            <a:pPr indent="0" marL="0">
+            <a:pPr marL="0" indent="0">
               <a:buNone/>
             </a:pPr>
             <a:r>
@@ -7803,7 +7789,7 @@
           <a:bodyPr wrap="square" lIns="0" tIns="0" rIns="0" bIns="0" rtlCol="0" anchor="ctr"/>
           <a:lstStyle/>
           <a:p>
-            <a:pPr indent="0" marL="0">
+            <a:pPr marL="0" indent="0">
               <a:buNone/>
             </a:pPr>
             <a:r>
@@ -7842,7 +7828,7 @@
           <a:bodyPr wrap="square" rtlCol="0" anchor="ctr"/>
           <a:lstStyle/>
           <a:p>
-            <a:pPr algn="r" indent="0" marL="0">
+            <a:pPr marL="0" indent="0" algn="r">
               <a:buNone/>
             </a:pPr>
             <a:r>
@@ -7873,6 +7859,7 @@
         <a:solidFill>
           <a:srgbClr val="06080D"/>
         </a:solidFill>
+        <a:effectLst/>
       </p:bgPr>
     </p:bg>
     <p:spTree>
@@ -7910,7 +7897,7 @@
           <a:bodyPr wrap="square" lIns="0" tIns="0" rIns="0" bIns="0" rtlCol="0" anchor="ctr"/>
           <a:lstStyle/>
           <a:p>
-            <a:pPr indent="0" marL="0">
+            <a:pPr marL="0" indent="0">
               <a:buNone/>
             </a:pPr>
             <a:r>
@@ -7949,7 +7936,7 @@
           <a:bodyPr wrap="square" lIns="0" tIns="0" rIns="0" bIns="0" rtlCol="0" anchor="ctr"/>
           <a:lstStyle/>
           <a:p>
-            <a:pPr indent="0" marL="0">
+            <a:pPr marL="0" indent="0">
               <a:buNone/>
             </a:pPr>
             <a:r>
@@ -7991,6 +7978,13 @@
             <a:prstDash val="solid"/>
           </a:ln>
         </p:spPr>
+        <p:txBody>
+          <a:bodyPr/>
+          <a:lstStyle/>
+          <a:p>
+            <a:endParaRPr lang="en-US"/>
+          </a:p>
+        </p:txBody>
       </p:sp>
       <p:sp>
         <p:nvSpPr>
@@ -8013,7 +8007,7 @@
           <a:bodyPr wrap="square" lIns="0" tIns="0" rIns="0" bIns="0" rtlCol="0" anchor="ctr"/>
           <a:lstStyle/>
           <a:p>
-            <a:pPr algn="ctr" indent="0" marL="0">
+            <a:pPr marL="0" indent="0" algn="ctr">
               <a:buNone/>
             </a:pPr>
             <a:r>
@@ -8049,7 +8043,7 @@
           <a:bodyPr wrap="square" lIns="0" tIns="0" rIns="0" bIns="0" rtlCol="0" anchor="ctr"/>
           <a:lstStyle/>
           <a:p>
-            <a:pPr indent="0" marL="0">
+            <a:pPr marL="0" indent="0">
               <a:buNone/>
             </a:pPr>
             <a:r>
@@ -8088,7 +8082,7 @@
           <a:bodyPr wrap="square" lIns="0" tIns="0" rIns="0" bIns="0" rtlCol="0" anchor="ctr"/>
           <a:lstStyle/>
           <a:p>
-            <a:pPr indent="0" marL="0">
+            <a:pPr marL="0" indent="0">
               <a:buNone/>
             </a:pPr>
             <a:r>
@@ -8130,6 +8124,13 @@
             <a:prstDash val="solid"/>
           </a:ln>
         </p:spPr>
+        <p:txBody>
+          <a:bodyPr/>
+          <a:lstStyle/>
+          <a:p>
+            <a:endParaRPr lang="en-US"/>
+          </a:p>
+        </p:txBody>
       </p:sp>
       <p:sp>
         <p:nvSpPr>
@@ -8152,7 +8153,7 @@
           <a:bodyPr wrap="square" lIns="0" tIns="0" rIns="0" bIns="0" rtlCol="0" anchor="ctr"/>
           <a:lstStyle/>
           <a:p>
-            <a:pPr algn="ctr" indent="0" marL="0">
+            <a:pPr marL="0" indent="0" algn="ctr">
               <a:buNone/>
             </a:pPr>
             <a:r>
@@ -8188,7 +8189,7 @@
           <a:bodyPr wrap="square" lIns="0" tIns="0" rIns="0" bIns="0" rtlCol="0" anchor="ctr"/>
           <a:lstStyle/>
           <a:p>
-            <a:pPr indent="0" marL="0">
+            <a:pPr marL="0" indent="0">
               <a:buNone/>
             </a:pPr>
             <a:r>
@@ -8227,7 +8228,7 @@
           <a:bodyPr wrap="square" lIns="0" tIns="0" rIns="0" bIns="0" rtlCol="0" anchor="ctr"/>
           <a:lstStyle/>
           <a:p>
-            <a:pPr indent="0" marL="0">
+            <a:pPr marL="0" indent="0">
               <a:buNone/>
             </a:pPr>
             <a:r>
@@ -8269,6 +8270,13 @@
             <a:prstDash val="solid"/>
           </a:ln>
         </p:spPr>
+        <p:txBody>
+          <a:bodyPr/>
+          <a:lstStyle/>
+          <a:p>
+            <a:endParaRPr lang="en-US"/>
+          </a:p>
+        </p:txBody>
       </p:sp>
       <p:sp>
         <p:nvSpPr>
@@ -8291,7 +8299,7 @@
           <a:bodyPr wrap="square" lIns="0" tIns="0" rIns="0" bIns="0" rtlCol="0" anchor="ctr"/>
           <a:lstStyle/>
           <a:p>
-            <a:pPr algn="ctr" indent="0" marL="0">
+            <a:pPr marL="0" indent="0" algn="ctr">
               <a:buNone/>
             </a:pPr>
             <a:r>
@@ -8327,7 +8335,7 @@
           <a:bodyPr wrap="square" lIns="0" tIns="0" rIns="0" bIns="0" rtlCol="0" anchor="ctr"/>
           <a:lstStyle/>
           <a:p>
-            <a:pPr indent="0" marL="0">
+            <a:pPr marL="0" indent="0">
               <a:buNone/>
             </a:pPr>
             <a:r>
@@ -8366,7 +8374,7 @@
           <a:bodyPr wrap="square" lIns="0" tIns="0" rIns="0" bIns="0" rtlCol="0" anchor="ctr"/>
           <a:lstStyle/>
           <a:p>
-            <a:pPr indent="0" marL="0">
+            <a:pPr marL="0" indent="0">
               <a:buNone/>
             </a:pPr>
             <a:r>
@@ -8408,6 +8416,13 @@
             <a:prstDash val="solid"/>
           </a:ln>
         </p:spPr>
+        <p:txBody>
+          <a:bodyPr/>
+          <a:lstStyle/>
+          <a:p>
+            <a:endParaRPr lang="en-US"/>
+          </a:p>
+        </p:txBody>
       </p:sp>
       <p:sp>
         <p:nvSpPr>
@@ -8430,7 +8445,7 @@
           <a:bodyPr wrap="square" lIns="0" tIns="0" rIns="0" bIns="0" rtlCol="0" anchor="ctr"/>
           <a:lstStyle/>
           <a:p>
-            <a:pPr algn="ctr" indent="0" marL="0">
+            <a:pPr marL="0" indent="0" algn="ctr">
               <a:buNone/>
             </a:pPr>
             <a:r>
@@ -8466,7 +8481,7 @@
           <a:bodyPr wrap="square" lIns="0" tIns="0" rIns="0" bIns="0" rtlCol="0" anchor="ctr"/>
           <a:lstStyle/>
           <a:p>
-            <a:pPr indent="0" marL="0">
+            <a:pPr marL="0" indent="0">
               <a:buNone/>
             </a:pPr>
             <a:r>
@@ -8505,7 +8520,7 @@
           <a:bodyPr wrap="square" lIns="0" tIns="0" rIns="0" bIns="0" rtlCol="0" anchor="ctr"/>
           <a:lstStyle/>
           <a:p>
-            <a:pPr indent="0" marL="0">
+            <a:pPr marL="0" indent="0">
               <a:buNone/>
             </a:pPr>
             <a:r>
@@ -8547,6 +8562,13 @@
             <a:prstDash val="solid"/>
           </a:ln>
         </p:spPr>
+        <p:txBody>
+          <a:bodyPr/>
+          <a:lstStyle/>
+          <a:p>
+            <a:endParaRPr lang="en-US"/>
+          </a:p>
+        </p:txBody>
       </p:sp>
       <p:sp>
         <p:nvSpPr>
@@ -8569,7 +8591,7 @@
           <a:bodyPr wrap="square" lIns="0" tIns="0" rIns="0" bIns="0" rtlCol="0" anchor="ctr"/>
           <a:lstStyle/>
           <a:p>
-            <a:pPr algn="ctr" indent="0" marL="0">
+            <a:pPr marL="0" indent="0" algn="ctr">
               <a:buNone/>
             </a:pPr>
             <a:r>
@@ -8605,7 +8627,7 @@
           <a:bodyPr wrap="square" lIns="0" tIns="0" rIns="0" bIns="0" rtlCol="0" anchor="ctr"/>
           <a:lstStyle/>
           <a:p>
-            <a:pPr indent="0" marL="0">
+            <a:pPr marL="0" indent="0">
               <a:buNone/>
             </a:pPr>
             <a:r>
@@ -8644,7 +8666,7 @@
           <a:bodyPr wrap="square" lIns="0" tIns="0" rIns="0" bIns="0" rtlCol="0" anchor="ctr"/>
           <a:lstStyle/>
           <a:p>
-            <a:pPr indent="0" marL="0">
+            <a:pPr marL="0" indent="0">
               <a:buNone/>
             </a:pPr>
             <a:r>
@@ -8683,7 +8705,7 @@
           <a:bodyPr wrap="square" rtlCol="0" anchor="ctr"/>
           <a:lstStyle/>
           <a:p>
-            <a:pPr algn="r" indent="0" marL="0">
+            <a:pPr marL="0" indent="0" algn="r">
               <a:buNone/>
             </a:pPr>
             <a:r>
@@ -8714,6 +8736,7 @@
         <a:solidFill>
           <a:srgbClr val="06080D"/>
         </a:solidFill>
+        <a:effectLst/>
       </p:bgPr>
     </p:bg>
     <p:spTree>
@@ -8751,7 +8774,7 @@
           <a:bodyPr wrap="square" lIns="0" tIns="0" rIns="0" bIns="0" rtlCol="0" anchor="ctr"/>
           <a:lstStyle/>
           <a:p>
-            <a:pPr indent="0" marL="0">
+            <a:pPr marL="0" indent="0">
               <a:buNone/>
             </a:pPr>
             <a:r>
@@ -8790,7 +8813,7 @@
           <a:bodyPr wrap="square" lIns="0" tIns="0" rIns="0" bIns="0" rtlCol="0" anchor="ctr"/>
           <a:lstStyle/>
           <a:p>
-            <a:pPr indent="0" marL="0">
+            <a:pPr marL="0" indent="0">
               <a:buNone/>
             </a:pPr>
             <a:r>
@@ -8832,6 +8855,13 @@
             <a:prstDash val="solid"/>
           </a:ln>
         </p:spPr>
+        <p:txBody>
+          <a:bodyPr/>
+          <a:lstStyle/>
+          <a:p>
+            <a:endParaRPr lang="en-US"/>
+          </a:p>
+        </p:txBody>
       </p:sp>
       <p:sp>
         <p:nvSpPr>
@@ -8854,7 +8884,7 @@
           <a:bodyPr wrap="square" lIns="0" tIns="0" rIns="0" bIns="0" rtlCol="0" anchor="ctr"/>
           <a:lstStyle/>
           <a:p>
-            <a:pPr indent="0" marL="0">
+            <a:pPr marL="0" indent="0">
               <a:buNone/>
             </a:pPr>
             <a:r>
@@ -8893,7 +8923,7 @@
           <a:bodyPr wrap="square" lIns="0" tIns="0" rIns="0" bIns="0" rtlCol="0" anchor="ctr"/>
           <a:lstStyle/>
           <a:p>
-            <a:pPr indent="0" marL="0">
+            <a:pPr marL="0" indent="0">
               <a:buNone/>
             </a:pPr>
             <a:r>
@@ -8935,6 +8965,13 @@
             <a:prstDash val="solid"/>
           </a:ln>
         </p:spPr>
+        <p:txBody>
+          <a:bodyPr/>
+          <a:lstStyle/>
+          <a:p>
+            <a:endParaRPr lang="en-US"/>
+          </a:p>
+        </p:txBody>
       </p:sp>
       <p:sp>
         <p:nvSpPr>
@@ -8957,7 +8994,7 @@
           <a:bodyPr wrap="square" lIns="0" tIns="0" rIns="0" bIns="0" rtlCol="0" anchor="ctr"/>
           <a:lstStyle/>
           <a:p>
-            <a:pPr indent="0" marL="0">
+            <a:pPr marL="0" indent="0">
               <a:buNone/>
             </a:pPr>
             <a:r>
@@ -8996,7 +9033,7 @@
           <a:bodyPr wrap="square" lIns="0" tIns="0" rIns="0" bIns="0" rtlCol="0" anchor="ctr"/>
           <a:lstStyle/>
           <a:p>
-            <a:pPr indent="0" marL="0">
+            <a:pPr marL="0" indent="0">
               <a:buNone/>
             </a:pPr>
             <a:r>
@@ -9038,6 +9075,13 @@
             <a:prstDash val="solid"/>
           </a:ln>
         </p:spPr>
+        <p:txBody>
+          <a:bodyPr/>
+          <a:lstStyle/>
+          <a:p>
+            <a:endParaRPr lang="en-US"/>
+          </a:p>
+        </p:txBody>
       </p:sp>
       <p:sp>
         <p:nvSpPr>
@@ -9060,7 +9104,7 @@
           <a:bodyPr wrap="square" lIns="0" tIns="0" rIns="0" bIns="0" rtlCol="0" anchor="ctr"/>
           <a:lstStyle/>
           <a:p>
-            <a:pPr indent="0" marL="0">
+            <a:pPr marL="0" indent="0">
               <a:buNone/>
             </a:pPr>
             <a:r>
@@ -9099,7 +9143,7 @@
           <a:bodyPr wrap="square" lIns="0" tIns="0" rIns="0" bIns="0" rtlCol="0" anchor="ctr"/>
           <a:lstStyle/>
           <a:p>
-            <a:pPr indent="0" marL="0">
+            <a:pPr marL="0" indent="0">
               <a:buNone/>
             </a:pPr>
             <a:r>
@@ -9141,6 +9185,13 @@
             <a:prstDash val="solid"/>
           </a:ln>
         </p:spPr>
+        <p:txBody>
+          <a:bodyPr/>
+          <a:lstStyle/>
+          <a:p>
+            <a:endParaRPr lang="en-US"/>
+          </a:p>
+        </p:txBody>
       </p:sp>
       <p:sp>
         <p:nvSpPr>
@@ -9163,7 +9214,7 @@
           <a:bodyPr wrap="square" lIns="0" tIns="0" rIns="0" bIns="0" rtlCol="0" anchor="ctr"/>
           <a:lstStyle/>
           <a:p>
-            <a:pPr indent="0" marL="0">
+            <a:pPr marL="0" indent="0">
               <a:buNone/>
             </a:pPr>
             <a:r>
@@ -9202,7 +9253,7 @@
           <a:bodyPr wrap="square" lIns="0" tIns="0" rIns="0" bIns="0" rtlCol="0" anchor="ctr"/>
           <a:lstStyle/>
           <a:p>
-            <a:pPr indent="0" marL="0">
+            <a:pPr marL="0" indent="0">
               <a:buNone/>
             </a:pPr>
             <a:r>
@@ -9244,6 +9295,13 @@
             <a:prstDash val="solid"/>
           </a:ln>
         </p:spPr>
+        <p:txBody>
+          <a:bodyPr/>
+          <a:lstStyle/>
+          <a:p>
+            <a:endParaRPr lang="en-US"/>
+          </a:p>
+        </p:txBody>
       </p:sp>
       <p:sp>
         <p:nvSpPr>
@@ -9266,7 +9324,7 @@
           <a:bodyPr wrap="square" lIns="0" tIns="0" rIns="0" bIns="0" rtlCol="0" anchor="ctr"/>
           <a:lstStyle/>
           <a:p>
-            <a:pPr indent="0" marL="0">
+            <a:pPr marL="0" indent="0">
               <a:buNone/>
             </a:pPr>
             <a:r>
@@ -9305,7 +9363,7 @@
           <a:bodyPr wrap="square" lIns="0" tIns="0" rIns="0" bIns="0" rtlCol="0" anchor="ctr"/>
           <a:lstStyle/>
           <a:p>
-            <a:pPr indent="0" marL="0">
+            <a:pPr marL="0" indent="0">
               <a:buNone/>
             </a:pPr>
             <a:r>
@@ -9347,6 +9405,13 @@
             <a:prstDash val="solid"/>
           </a:ln>
         </p:spPr>
+        <p:txBody>
+          <a:bodyPr/>
+          <a:lstStyle/>
+          <a:p>
+            <a:endParaRPr lang="en-US"/>
+          </a:p>
+        </p:txBody>
       </p:sp>
       <p:sp>
         <p:nvSpPr>
@@ -9369,7 +9434,7 @@
           <a:bodyPr wrap="square" lIns="0" tIns="0" rIns="0" bIns="0" rtlCol="0" anchor="ctr"/>
           <a:lstStyle/>
           <a:p>
-            <a:pPr indent="0" marL="0">
+            <a:pPr marL="0" indent="0">
               <a:buNone/>
             </a:pPr>
             <a:r>
@@ -9408,7 +9473,7 @@
           <a:bodyPr wrap="square" lIns="0" tIns="0" rIns="0" bIns="0" rtlCol="0" anchor="ctr"/>
           <a:lstStyle/>
           <a:p>
-            <a:pPr indent="0" marL="0">
+            <a:pPr marL="0" indent="0">
               <a:buNone/>
             </a:pPr>
             <a:r>
@@ -9450,6 +9515,13 @@
             <a:prstDash val="solid"/>
           </a:ln>
         </p:spPr>
+        <p:txBody>
+          <a:bodyPr/>
+          <a:lstStyle/>
+          <a:p>
+            <a:endParaRPr lang="en-US"/>
+          </a:p>
+        </p:txBody>
       </p:sp>
       <p:sp>
         <p:nvSpPr>
@@ -9472,7 +9544,7 @@
           <a:bodyPr wrap="square" lIns="0" tIns="0" rIns="0" bIns="0" rtlCol="0" anchor="ctr"/>
           <a:lstStyle/>
           <a:p>
-            <a:pPr indent="0" marL="0">
+            <a:pPr marL="0" indent="0">
               <a:buNone/>
             </a:pPr>
             <a:r>
@@ -9511,7 +9583,7 @@
           <a:bodyPr wrap="square" lIns="0" tIns="0" rIns="0" bIns="0" rtlCol="0" anchor="ctr"/>
           <a:lstStyle/>
           <a:p>
-            <a:pPr indent="0" marL="0">
+            <a:pPr marL="0" indent="0">
               <a:buNone/>
             </a:pPr>
             <a:r>
@@ -9553,6 +9625,13 @@
             <a:prstDash val="solid"/>
           </a:ln>
         </p:spPr>
+        <p:txBody>
+          <a:bodyPr/>
+          <a:lstStyle/>
+          <a:p>
+            <a:endParaRPr lang="en-US"/>
+          </a:p>
+        </p:txBody>
       </p:sp>
       <p:sp>
         <p:nvSpPr>
@@ -9575,7 +9654,7 @@
           <a:bodyPr wrap="square" lIns="0" tIns="0" rIns="0" bIns="0" rtlCol="0" anchor="ctr"/>
           <a:lstStyle/>
           <a:p>
-            <a:pPr indent="0" marL="0">
+            <a:pPr marL="0" indent="0">
               <a:buNone/>
             </a:pPr>
             <a:r>
@@ -9614,7 +9693,7 @@
           <a:bodyPr wrap="square" lIns="0" tIns="0" rIns="0" bIns="0" rtlCol="0" anchor="ctr"/>
           <a:lstStyle/>
           <a:p>
-            <a:pPr indent="0" marL="0">
+            <a:pPr marL="0" indent="0">
               <a:buNone/>
             </a:pPr>
             <a:r>
@@ -9653,7 +9732,7 @@
           <a:bodyPr wrap="square" rtlCol="0" anchor="ctr"/>
           <a:lstStyle/>
           <a:p>
-            <a:pPr algn="r" indent="0" marL="0">
+            <a:pPr marL="0" indent="0" algn="r">
               <a:buNone/>
             </a:pPr>
             <a:r>
@@ -9684,6 +9763,7 @@
         <a:solidFill>
           <a:srgbClr val="06080D"/>
         </a:solidFill>
+        <a:effectLst/>
       </p:bgPr>
     </p:bg>
     <p:spTree>
@@ -9721,7 +9801,7 @@
           <a:bodyPr wrap="square" lIns="0" tIns="0" rIns="0" bIns="0" rtlCol="0" anchor="ctr"/>
           <a:lstStyle/>
           <a:p>
-            <a:pPr indent="0" marL="0">
+            <a:pPr marL="0" indent="0">
               <a:buNone/>
             </a:pPr>
             <a:r>
@@ -9763,6 +9843,13 @@
             <a:prstDash val="solid"/>
           </a:ln>
         </p:spPr>
+        <p:txBody>
+          <a:bodyPr/>
+          <a:lstStyle/>
+          <a:p>
+            <a:endParaRPr lang="en-US"/>
+          </a:p>
+        </p:txBody>
       </p:sp>
       <p:sp>
         <p:nvSpPr>
@@ -9785,7 +9872,7 @@
           <a:bodyPr wrap="square" lIns="0" tIns="0" rIns="0" bIns="0" rtlCol="0" anchor="ctr"/>
           <a:lstStyle/>
           <a:p>
-            <a:pPr algn="ctr" indent="0" marL="0">
+            <a:pPr marL="0" indent="0" algn="ctr">
               <a:buNone/>
             </a:pPr>
             <a:r>
@@ -9824,7 +9911,7 @@
           <a:bodyPr wrap="square" lIns="0" tIns="0" rIns="0" bIns="0" rtlCol="0" anchor="ctr"/>
           <a:lstStyle/>
           <a:p>
-            <a:pPr algn="ctr" indent="0" marL="0">
+            <a:pPr marL="0" indent="0" algn="ctr">
               <a:buNone/>
             </a:pPr>
             <a:r>
@@ -9863,7 +9950,7 @@
           <a:bodyPr wrap="square" lIns="0" tIns="0" rIns="0" bIns="0" rtlCol="0" anchor="ctr"/>
           <a:lstStyle/>
           <a:p>
-            <a:pPr algn="ctr" indent="0" marL="0">
+            <a:pPr marL="0" indent="0" algn="ctr">
               <a:buNone/>
             </a:pPr>
             <a:r>
@@ -9905,6 +9992,13 @@
             <a:prstDash val="solid"/>
           </a:ln>
         </p:spPr>
+        <p:txBody>
+          <a:bodyPr/>
+          <a:lstStyle/>
+          <a:p>
+            <a:endParaRPr lang="en-US"/>
+          </a:p>
+        </p:txBody>
       </p:sp>
       <p:sp>
         <p:nvSpPr>
@@ -9927,7 +10021,7 @@
           <a:bodyPr wrap="square" lIns="0" tIns="0" rIns="0" bIns="0" rtlCol="0" anchor="ctr"/>
           <a:lstStyle/>
           <a:p>
-            <a:pPr algn="ctr" indent="0" marL="0">
+            <a:pPr marL="0" indent="0" algn="ctr">
               <a:buNone/>
             </a:pPr>
             <a:r>
@@ -9966,7 +10060,7 @@
           <a:bodyPr wrap="square" lIns="0" tIns="0" rIns="0" bIns="0" rtlCol="0" anchor="ctr"/>
           <a:lstStyle/>
           <a:p>
-            <a:pPr algn="ctr" indent="0" marL="0">
+            <a:pPr marL="0" indent="0" algn="ctr">
               <a:buNone/>
             </a:pPr>
             <a:r>
@@ -10005,7 +10099,7 @@
           <a:bodyPr wrap="square" lIns="0" tIns="0" rIns="0" bIns="0" rtlCol="0" anchor="ctr"/>
           <a:lstStyle/>
           <a:p>
-            <a:pPr algn="ctr" indent="0" marL="0">
+            <a:pPr marL="0" indent="0" algn="ctr">
               <a:buNone/>
             </a:pPr>
             <a:r>
@@ -10047,6 +10141,13 @@
             <a:prstDash val="solid"/>
           </a:ln>
         </p:spPr>
+        <p:txBody>
+          <a:bodyPr/>
+          <a:lstStyle/>
+          <a:p>
+            <a:endParaRPr lang="en-US"/>
+          </a:p>
+        </p:txBody>
       </p:sp>
       <p:sp>
         <p:nvSpPr>
@@ -10069,7 +10170,7 @@
           <a:bodyPr wrap="square" lIns="0" tIns="0" rIns="0" bIns="0" rtlCol="0" anchor="ctr"/>
           <a:lstStyle/>
           <a:p>
-            <a:pPr algn="ctr" indent="0" marL="0">
+            <a:pPr marL="0" indent="0" algn="ctr">
               <a:buNone/>
             </a:pPr>
             <a:r>
@@ -10108,7 +10209,7 @@
           <a:bodyPr wrap="square" lIns="0" tIns="0" rIns="0" bIns="0" rtlCol="0" anchor="ctr"/>
           <a:lstStyle/>
           <a:p>
-            <a:pPr algn="ctr" indent="0" marL="0">
+            <a:pPr marL="0" indent="0" algn="ctr">
               <a:buNone/>
             </a:pPr>
             <a:r>
@@ -10147,7 +10248,7 @@
           <a:bodyPr wrap="square" lIns="0" tIns="0" rIns="0" bIns="0" rtlCol="0" anchor="ctr"/>
           <a:lstStyle/>
           <a:p>
-            <a:pPr algn="ctr" indent="0" marL="0">
+            <a:pPr marL="0" indent="0" algn="ctr">
               <a:buNone/>
             </a:pPr>
             <a:r>
@@ -10189,6 +10290,13 @@
             <a:prstDash val="solid"/>
           </a:ln>
         </p:spPr>
+        <p:txBody>
+          <a:bodyPr/>
+          <a:lstStyle/>
+          <a:p>
+            <a:endParaRPr lang="en-US"/>
+          </a:p>
+        </p:txBody>
       </p:sp>
       <p:sp>
         <p:nvSpPr>
@@ -10211,7 +10319,7 @@
           <a:bodyPr wrap="square" lIns="0" tIns="0" rIns="0" bIns="0" rtlCol="0" anchor="ctr"/>
           <a:lstStyle/>
           <a:p>
-            <a:pPr algn="ctr" indent="0" marL="0">
+            <a:pPr marL="0" indent="0" algn="ctr">
               <a:buNone/>
             </a:pPr>
             <a:r>
@@ -10250,7 +10358,7 @@
           <a:bodyPr wrap="square" lIns="0" tIns="0" rIns="0" bIns="0" rtlCol="0" anchor="ctr"/>
           <a:lstStyle/>
           <a:p>
-            <a:pPr algn="ctr" indent="0" marL="0">
+            <a:pPr marL="0" indent="0" algn="ctr">
               <a:buNone/>
             </a:pPr>
             <a:r>
@@ -10289,7 +10397,7 @@
           <a:bodyPr wrap="square" lIns="0" tIns="0" rIns="0" bIns="0" rtlCol="0" anchor="ctr"/>
           <a:lstStyle/>
           <a:p>
-            <a:pPr algn="ctr" indent="0" marL="0">
+            <a:pPr marL="0" indent="0" algn="ctr">
               <a:buNone/>
             </a:pPr>
             <a:r>
@@ -10328,7 +10436,7 @@
           <a:bodyPr wrap="square" rtlCol="0" anchor="ctr"/>
           <a:lstStyle/>
           <a:p>
-            <a:pPr algn="r" indent="0" marL="0">
+            <a:pPr marL="0" indent="0" algn="r">
               <a:buNone/>
             </a:pPr>
             <a:r>
@@ -10359,6 +10467,7 @@
         <a:solidFill>
           <a:srgbClr val="06080D"/>
         </a:solidFill>
+        <a:effectLst/>
       </p:bgPr>
     </p:bg>
     <p:spTree>
@@ -10396,7 +10505,7 @@
           <a:bodyPr wrap="square" lIns="0" tIns="0" rIns="0" bIns="0" rtlCol="0" anchor="ctr"/>
           <a:lstStyle/>
           <a:p>
-            <a:pPr indent="0" marL="0">
+            <a:pPr marL="0" indent="0">
               <a:buNone/>
             </a:pPr>
             <a:r>
@@ -10435,7 +10544,7 @@
           <a:bodyPr wrap="square" lIns="0" tIns="0" rIns="0" bIns="0" rtlCol="0" anchor="ctr"/>
           <a:lstStyle/>
           <a:p>
-            <a:pPr indent="0" marL="0">
+            <a:pPr marL="0" indent="0">
               <a:buNone/>
             </a:pPr>
             <a:r>
@@ -10474,7 +10583,7 @@
           <a:bodyPr wrap="square" lIns="0" tIns="0" rIns="0" bIns="0" rtlCol="0" anchor="ctr"/>
           <a:lstStyle/>
           <a:p>
-            <a:pPr indent="0" marL="0">
+            <a:pPr marL="0" indent="0">
               <a:buNone/>
             </a:pPr>
             <a:r>
@@ -10511,6 +10620,13 @@
           </a:solidFill>
           <a:ln/>
         </p:spPr>
+        <p:txBody>
+          <a:bodyPr/>
+          <a:lstStyle/>
+          <a:p>
+            <a:endParaRPr lang="en-US"/>
+          </a:p>
+        </p:txBody>
       </p:sp>
       <p:sp>
         <p:nvSpPr>
@@ -10531,6 +10647,13 @@
           </a:solidFill>
           <a:ln/>
         </p:spPr>
+        <p:txBody>
+          <a:bodyPr/>
+          <a:lstStyle/>
+          <a:p>
+            <a:endParaRPr lang="en-US"/>
+          </a:p>
+        </p:txBody>
       </p:sp>
       <p:sp>
         <p:nvSpPr>
@@ -10551,6 +10674,13 @@
           </a:solidFill>
           <a:ln/>
         </p:spPr>
+        <p:txBody>
+          <a:bodyPr/>
+          <a:lstStyle/>
+          <a:p>
+            <a:endParaRPr lang="en-US"/>
+          </a:p>
+        </p:txBody>
       </p:sp>
       <p:sp>
         <p:nvSpPr>
@@ -10573,7 +10703,7 @@
           <a:bodyPr wrap="square" lIns="0" tIns="0" rIns="0" bIns="0" rtlCol="0" anchor="ctr"/>
           <a:lstStyle/>
           <a:p>
-            <a:pPr algn="r" indent="0" marL="0">
+            <a:pPr marL="0" indent="0" algn="r">
               <a:buNone/>
             </a:pPr>
             <a:r>
@@ -10612,7 +10742,7 @@
           <a:bodyPr wrap="square" lIns="0" tIns="0" rIns="0" bIns="0" rtlCol="0" anchor="ctr"/>
           <a:lstStyle/>
           <a:p>
-            <a:pPr indent="0" marL="0">
+            <a:pPr marL="0" indent="0">
               <a:buNone/>
             </a:pPr>
             <a:r>
@@ -10649,6 +10779,13 @@
           </a:solidFill>
           <a:ln/>
         </p:spPr>
+        <p:txBody>
+          <a:bodyPr/>
+          <a:lstStyle/>
+          <a:p>
+            <a:endParaRPr lang="en-US"/>
+          </a:p>
+        </p:txBody>
       </p:sp>
       <p:sp>
         <p:nvSpPr>
@@ -10669,6 +10806,13 @@
           </a:solidFill>
           <a:ln/>
         </p:spPr>
+        <p:txBody>
+          <a:bodyPr/>
+          <a:lstStyle/>
+          <a:p>
+            <a:endParaRPr lang="en-US"/>
+          </a:p>
+        </p:txBody>
       </p:sp>
       <p:sp>
         <p:nvSpPr>
@@ -10689,6 +10833,13 @@
           </a:solidFill>
           <a:ln/>
         </p:spPr>
+        <p:txBody>
+          <a:bodyPr/>
+          <a:lstStyle/>
+          <a:p>
+            <a:endParaRPr lang="en-US"/>
+          </a:p>
+        </p:txBody>
       </p:sp>
       <p:sp>
         <p:nvSpPr>
@@ -10711,7 +10862,7 @@
           <a:bodyPr wrap="square" lIns="0" tIns="0" rIns="0" bIns="0" rtlCol="0" anchor="ctr"/>
           <a:lstStyle/>
           <a:p>
-            <a:pPr algn="r" indent="0" marL="0">
+            <a:pPr marL="0" indent="0" algn="r">
               <a:buNone/>
             </a:pPr>
             <a:r>
@@ -10750,7 +10901,7 @@
           <a:bodyPr wrap="square" lIns="0" tIns="0" rIns="0" bIns="0" rtlCol="0" anchor="ctr"/>
           <a:lstStyle/>
           <a:p>
-            <a:pPr indent="0" marL="0">
+            <a:pPr marL="0" indent="0">
               <a:buNone/>
             </a:pPr>
             <a:r>
@@ -10787,6 +10938,13 @@
           </a:solidFill>
           <a:ln/>
         </p:spPr>
+        <p:txBody>
+          <a:bodyPr/>
+          <a:lstStyle/>
+          <a:p>
+            <a:endParaRPr lang="en-US"/>
+          </a:p>
+        </p:txBody>
       </p:sp>
       <p:sp>
         <p:nvSpPr>
@@ -10807,6 +10965,13 @@
           </a:solidFill>
           <a:ln/>
         </p:spPr>
+        <p:txBody>
+          <a:bodyPr/>
+          <a:lstStyle/>
+          <a:p>
+            <a:endParaRPr lang="en-US"/>
+          </a:p>
+        </p:txBody>
       </p:sp>
       <p:sp>
         <p:nvSpPr>
@@ -10827,6 +10992,13 @@
           </a:solidFill>
           <a:ln/>
         </p:spPr>
+        <p:txBody>
+          <a:bodyPr/>
+          <a:lstStyle/>
+          <a:p>
+            <a:endParaRPr lang="en-US"/>
+          </a:p>
+        </p:txBody>
       </p:sp>
       <p:sp>
         <p:nvSpPr>
@@ -10849,7 +11021,7 @@
           <a:bodyPr wrap="square" lIns="0" tIns="0" rIns="0" bIns="0" rtlCol="0" anchor="ctr"/>
           <a:lstStyle/>
           <a:p>
-            <a:pPr algn="r" indent="0" marL="0">
+            <a:pPr marL="0" indent="0" algn="r">
               <a:buNone/>
             </a:pPr>
             <a:r>
@@ -10888,7 +11060,7 @@
           <a:bodyPr wrap="square" lIns="0" tIns="0" rIns="0" bIns="0" rtlCol="0" anchor="ctr"/>
           <a:lstStyle/>
           <a:p>
-            <a:pPr indent="0" marL="0">
+            <a:pPr marL="0" indent="0">
               <a:buNone/>
             </a:pPr>
             <a:r>
@@ -10925,6 +11097,13 @@
           </a:solidFill>
           <a:ln/>
         </p:spPr>
+        <p:txBody>
+          <a:bodyPr/>
+          <a:lstStyle/>
+          <a:p>
+            <a:endParaRPr lang="en-US"/>
+          </a:p>
+        </p:txBody>
       </p:sp>
       <p:sp>
         <p:nvSpPr>
@@ -10945,6 +11124,13 @@
           </a:solidFill>
           <a:ln/>
         </p:spPr>
+        <p:txBody>
+          <a:bodyPr/>
+          <a:lstStyle/>
+          <a:p>
+            <a:endParaRPr lang="en-US"/>
+          </a:p>
+        </p:txBody>
       </p:sp>
       <p:sp>
         <p:nvSpPr>
@@ -10965,6 +11151,13 @@
           </a:solidFill>
           <a:ln/>
         </p:spPr>
+        <p:txBody>
+          <a:bodyPr/>
+          <a:lstStyle/>
+          <a:p>
+            <a:endParaRPr lang="en-US"/>
+          </a:p>
+        </p:txBody>
       </p:sp>
       <p:sp>
         <p:nvSpPr>
@@ -10987,7 +11180,7 @@
           <a:bodyPr wrap="square" lIns="0" tIns="0" rIns="0" bIns="0" rtlCol="0" anchor="ctr"/>
           <a:lstStyle/>
           <a:p>
-            <a:pPr algn="r" indent="0" marL="0">
+            <a:pPr marL="0" indent="0" algn="r">
               <a:buNone/>
             </a:pPr>
             <a:r>
@@ -11026,7 +11219,7 @@
           <a:bodyPr wrap="square" lIns="0" tIns="0" rIns="0" bIns="0" rtlCol="0" anchor="ctr"/>
           <a:lstStyle/>
           <a:p>
-            <a:pPr indent="0" marL="0">
+            <a:pPr marL="0" indent="0">
               <a:buNone/>
             </a:pPr>
             <a:r>
@@ -11063,6 +11256,13 @@
           </a:solidFill>
           <a:ln/>
         </p:spPr>
+        <p:txBody>
+          <a:bodyPr/>
+          <a:lstStyle/>
+          <a:p>
+            <a:endParaRPr lang="en-US"/>
+          </a:p>
+        </p:txBody>
       </p:sp>
       <p:sp>
         <p:nvSpPr>
@@ -11083,6 +11283,13 @@
           </a:solidFill>
           <a:ln/>
         </p:spPr>
+        <p:txBody>
+          <a:bodyPr/>
+          <a:lstStyle/>
+          <a:p>
+            <a:endParaRPr lang="en-US"/>
+          </a:p>
+        </p:txBody>
       </p:sp>
       <p:sp>
         <p:nvSpPr>
@@ -11103,6 +11310,13 @@
           </a:solidFill>
           <a:ln/>
         </p:spPr>
+        <p:txBody>
+          <a:bodyPr/>
+          <a:lstStyle/>
+          <a:p>
+            <a:endParaRPr lang="en-US"/>
+          </a:p>
+        </p:txBody>
       </p:sp>
       <p:sp>
         <p:nvSpPr>
@@ -11125,7 +11339,7 @@
           <a:bodyPr wrap="square" lIns="0" tIns="0" rIns="0" bIns="0" rtlCol="0" anchor="ctr"/>
           <a:lstStyle/>
           <a:p>
-            <a:pPr algn="r" indent="0" marL="0">
+            <a:pPr marL="0" indent="0" algn="r">
               <a:buNone/>
             </a:pPr>
             <a:r>
@@ -11164,7 +11378,7 @@
           <a:bodyPr wrap="square" lIns="0" tIns="0" rIns="0" bIns="0" rtlCol="0" anchor="ctr"/>
           <a:lstStyle/>
           <a:p>
-            <a:pPr indent="0" marL="0">
+            <a:pPr marL="0" indent="0">
               <a:buNone/>
             </a:pPr>
             <a:r>
@@ -11201,6 +11415,13 @@
           </a:solidFill>
           <a:ln/>
         </p:spPr>
+        <p:txBody>
+          <a:bodyPr/>
+          <a:lstStyle/>
+          <a:p>
+            <a:endParaRPr lang="en-US"/>
+          </a:p>
+        </p:txBody>
       </p:sp>
       <p:sp>
         <p:nvSpPr>
@@ -11221,6 +11442,13 @@
           </a:solidFill>
           <a:ln/>
         </p:spPr>
+        <p:txBody>
+          <a:bodyPr/>
+          <a:lstStyle/>
+          <a:p>
+            <a:endParaRPr lang="en-US"/>
+          </a:p>
+        </p:txBody>
       </p:sp>
       <p:sp>
         <p:nvSpPr>
@@ -11241,6 +11469,13 @@
           </a:solidFill>
           <a:ln/>
         </p:spPr>
+        <p:txBody>
+          <a:bodyPr/>
+          <a:lstStyle/>
+          <a:p>
+            <a:endParaRPr lang="en-US"/>
+          </a:p>
+        </p:txBody>
       </p:sp>
       <p:sp>
         <p:nvSpPr>
@@ -11263,7 +11498,7 @@
           <a:bodyPr wrap="square" lIns="0" tIns="0" rIns="0" bIns="0" rtlCol="0" anchor="ctr"/>
           <a:lstStyle/>
           <a:p>
-            <a:pPr algn="r" indent="0" marL="0">
+            <a:pPr marL="0" indent="0" algn="r">
               <a:buNone/>
             </a:pPr>
             <a:r>
@@ -11300,6 +11535,13 @@
           </a:solidFill>
           <a:ln/>
         </p:spPr>
+        <p:txBody>
+          <a:bodyPr/>
+          <a:lstStyle/>
+          <a:p>
+            <a:endParaRPr lang="en-US"/>
+          </a:p>
+        </p:txBody>
       </p:sp>
       <p:sp>
         <p:nvSpPr>
@@ -11322,7 +11564,7 @@
           <a:bodyPr wrap="square" lIns="0" tIns="0" rIns="0" bIns="0" rtlCol="0" anchor="ctr"/>
           <a:lstStyle/>
           <a:p>
-            <a:pPr indent="0" marL="0">
+            <a:pPr marL="0" indent="0">
               <a:buNone/>
             </a:pPr>
             <a:r>
@@ -11361,7 +11603,7 @@
           <a:bodyPr wrap="square" rtlCol="0" anchor="ctr"/>
           <a:lstStyle/>
           <a:p>
-            <a:pPr algn="r" indent="0" marL="0">
+            <a:pPr marL="0" indent="0" algn="r">
               <a:buNone/>
             </a:pPr>
             <a:r>
@@ -11392,6 +11634,7 @@
         <a:solidFill>
           <a:srgbClr val="06080D"/>
         </a:solidFill>
+        <a:effectLst/>
       </p:bgPr>
     </p:bg>
     <p:spTree>
@@ -11429,7 +11672,7 @@
           <a:bodyPr wrap="square" lIns="0" tIns="0" rIns="0" bIns="0" rtlCol="0" anchor="ctr"/>
           <a:lstStyle/>
           <a:p>
-            <a:pPr indent="0" marL="0">
+            <a:pPr marL="0" indent="0">
               <a:buNone/>
             </a:pPr>
             <a:r>
@@ -11466,6 +11709,13 @@
           </a:solidFill>
           <a:ln/>
         </p:spPr>
+        <p:txBody>
+          <a:bodyPr/>
+          <a:lstStyle/>
+          <a:p>
+            <a:endParaRPr lang="en-US"/>
+          </a:p>
+        </p:txBody>
       </p:sp>
       <p:sp>
         <p:nvSpPr>
@@ -11488,7 +11738,7 @@
           <a:bodyPr wrap="square" lIns="0" tIns="0" rIns="0" bIns="0" rtlCol="0" anchor="ctr"/>
           <a:lstStyle/>
           <a:p>
-            <a:pPr algn="ctr" indent="0" marL="0">
+            <a:pPr marL="0" indent="0" algn="ctr">
               <a:buNone/>
             </a:pPr>
             <a:endParaRPr lang="en-US" sz="1000" dirty="0"/>
@@ -11514,6 +11764,13 @@
           </a:solidFill>
           <a:ln/>
         </p:spPr>
+        <p:txBody>
+          <a:bodyPr/>
+          <a:lstStyle/>
+          <a:p>
+            <a:endParaRPr lang="en-US"/>
+          </a:p>
+        </p:txBody>
       </p:sp>
       <p:sp>
         <p:nvSpPr>
@@ -11536,7 +11793,7 @@
           <a:bodyPr wrap="square" lIns="0" tIns="0" rIns="0" bIns="0" rtlCol="0" anchor="ctr"/>
           <a:lstStyle/>
           <a:p>
-            <a:pPr algn="ctr" indent="0" marL="0">
+            <a:pPr marL="0" indent="0" algn="ctr">
               <a:buNone/>
             </a:pPr>
             <a:r>
@@ -11573,6 +11830,13 @@
           </a:solidFill>
           <a:ln/>
         </p:spPr>
+        <p:txBody>
+          <a:bodyPr/>
+          <a:lstStyle/>
+          <a:p>
+            <a:endParaRPr lang="en-US"/>
+          </a:p>
+        </p:txBody>
       </p:sp>
       <p:sp>
         <p:nvSpPr>
@@ -11595,7 +11859,7 @@
           <a:bodyPr wrap="square" lIns="0" tIns="0" rIns="0" bIns="0" rtlCol="0" anchor="ctr"/>
           <a:lstStyle/>
           <a:p>
-            <a:pPr algn="ctr" indent="0" marL="0">
+            <a:pPr marL="0" indent="0" algn="ctr">
               <a:buNone/>
             </a:pPr>
             <a:r>
@@ -11632,6 +11896,13 @@
           </a:solidFill>
           <a:ln/>
         </p:spPr>
+        <p:txBody>
+          <a:bodyPr/>
+          <a:lstStyle/>
+          <a:p>
+            <a:endParaRPr lang="en-US"/>
+          </a:p>
+        </p:txBody>
       </p:sp>
       <p:sp>
         <p:nvSpPr>
@@ -11654,7 +11925,7 @@
           <a:bodyPr wrap="square" lIns="0" tIns="0" rIns="0" bIns="0" rtlCol="0" anchor="ctr"/>
           <a:lstStyle/>
           <a:p>
-            <a:pPr algn="ctr" indent="0" marL="0">
+            <a:pPr marL="0" indent="0" algn="ctr">
               <a:buNone/>
             </a:pPr>
             <a:r>
@@ -11691,6 +11962,13 @@
           </a:solidFill>
           <a:ln/>
         </p:spPr>
+        <p:txBody>
+          <a:bodyPr/>
+          <a:lstStyle/>
+          <a:p>
+            <a:endParaRPr lang="en-US"/>
+          </a:p>
+        </p:txBody>
       </p:sp>
       <p:sp>
         <p:nvSpPr>
@@ -11713,7 +11991,7 @@
           <a:bodyPr wrap="square" lIns="0" tIns="0" rIns="0" bIns="0" rtlCol="0" anchor="ctr"/>
           <a:lstStyle/>
           <a:p>
-            <a:pPr algn="ctr" indent="0" marL="0">
+            <a:pPr marL="0" indent="0" algn="ctr">
               <a:buNone/>
             </a:pPr>
             <a:r>
@@ -11750,6 +12028,13 @@
           </a:solidFill>
           <a:ln/>
         </p:spPr>
+        <p:txBody>
+          <a:bodyPr/>
+          <a:lstStyle/>
+          <a:p>
+            <a:endParaRPr lang="en-US"/>
+          </a:p>
+        </p:txBody>
       </p:sp>
       <p:sp>
         <p:nvSpPr>
@@ -11772,7 +12057,7 @@
           <a:bodyPr wrap="square" lIns="50800" tIns="50800" rIns="50800" bIns="50800" rtlCol="0" anchor="ctr"/>
           <a:lstStyle/>
           <a:p>
-            <a:pPr algn="l" indent="0" marL="0">
+            <a:pPr marL="0" indent="0" algn="l">
               <a:buNone/>
             </a:pPr>
             <a:r>
@@ -11809,6 +12094,13 @@
           </a:solidFill>
           <a:ln/>
         </p:spPr>
+        <p:txBody>
+          <a:bodyPr/>
+          <a:lstStyle/>
+          <a:p>
+            <a:endParaRPr lang="en-US"/>
+          </a:p>
+        </p:txBody>
       </p:sp>
       <p:sp>
         <p:nvSpPr>
@@ -11831,7 +12123,7 @@
           <a:bodyPr wrap="square" lIns="0" tIns="0" rIns="0" bIns="0" rtlCol="0" anchor="ctr"/>
           <a:lstStyle/>
           <a:p>
-            <a:pPr algn="ctr" indent="0" marL="0">
+            <a:pPr marL="0" indent="0" algn="ctr">
               <a:buNone/>
             </a:pPr>
             <a:r>
@@ -11868,6 +12160,13 @@
           </a:solidFill>
           <a:ln/>
         </p:spPr>
+        <p:txBody>
+          <a:bodyPr/>
+          <a:lstStyle/>
+          <a:p>
+            <a:endParaRPr lang="en-US"/>
+          </a:p>
+        </p:txBody>
       </p:sp>
       <p:sp>
         <p:nvSpPr>
@@ -11890,7 +12189,7 @@
           <a:bodyPr wrap="square" lIns="0" tIns="0" rIns="0" bIns="0" rtlCol="0" anchor="ctr"/>
           <a:lstStyle/>
           <a:p>
-            <a:pPr algn="ctr" indent="0" marL="0">
+            <a:pPr marL="0" indent="0" algn="ctr">
               <a:buNone/>
             </a:pPr>
             <a:r>
@@ -11927,6 +12226,13 @@
           </a:solidFill>
           <a:ln/>
         </p:spPr>
+        <p:txBody>
+          <a:bodyPr/>
+          <a:lstStyle/>
+          <a:p>
+            <a:endParaRPr lang="en-US"/>
+          </a:p>
+        </p:txBody>
       </p:sp>
       <p:sp>
         <p:nvSpPr>
@@ -11949,7 +12255,7 @@
           <a:bodyPr wrap="square" lIns="0" tIns="0" rIns="0" bIns="0" rtlCol="0" anchor="ctr"/>
           <a:lstStyle/>
           <a:p>
-            <a:pPr algn="ctr" indent="0" marL="0">
+            <a:pPr marL="0" indent="0" algn="ctr">
               <a:buNone/>
             </a:pPr>
             <a:r>
@@ -11986,6 +12292,13 @@
           </a:solidFill>
           <a:ln/>
         </p:spPr>
+        <p:txBody>
+          <a:bodyPr/>
+          <a:lstStyle/>
+          <a:p>
+            <a:endParaRPr lang="en-US"/>
+          </a:p>
+        </p:txBody>
       </p:sp>
       <p:sp>
         <p:nvSpPr>
@@ -12008,7 +12321,7 @@
           <a:bodyPr wrap="square" lIns="0" tIns="0" rIns="0" bIns="0" rtlCol="0" anchor="ctr"/>
           <a:lstStyle/>
           <a:p>
-            <a:pPr algn="ctr" indent="0" marL="0">
+            <a:pPr marL="0" indent="0" algn="ctr">
               <a:buNone/>
             </a:pPr>
             <a:r>
@@ -12047,7 +12360,7 @@
           <a:bodyPr wrap="square" lIns="50800" tIns="50800" rIns="50800" bIns="50800" rtlCol="0" anchor="ctr"/>
           <a:lstStyle/>
           <a:p>
-            <a:pPr algn="l" indent="0" marL="0">
+            <a:pPr marL="0" indent="0" algn="l">
               <a:buNone/>
             </a:pPr>
             <a:r>
@@ -12086,7 +12399,7 @@
           <a:bodyPr wrap="square" lIns="0" tIns="0" rIns="0" bIns="0" rtlCol="0" anchor="ctr"/>
           <a:lstStyle/>
           <a:p>
-            <a:pPr algn="ctr" indent="0" marL="0">
+            <a:pPr marL="0" indent="0" algn="ctr">
               <a:buNone/>
             </a:pPr>
             <a:r>
@@ -12125,7 +12438,7 @@
           <a:bodyPr wrap="square" lIns="0" tIns="0" rIns="0" bIns="0" rtlCol="0" anchor="ctr"/>
           <a:lstStyle/>
           <a:p>
-            <a:pPr algn="ctr" indent="0" marL="0">
+            <a:pPr marL="0" indent="0" algn="ctr">
               <a:buNone/>
             </a:pPr>
             <a:r>
@@ -12164,7 +12477,7 @@
           <a:bodyPr wrap="square" lIns="0" tIns="0" rIns="0" bIns="0" rtlCol="0" anchor="ctr"/>
           <a:lstStyle/>
           <a:p>
-            <a:pPr algn="ctr" indent="0" marL="0">
+            <a:pPr marL="0" indent="0" algn="ctr">
               <a:buNone/>
             </a:pPr>
             <a:r>
@@ -12203,7 +12516,7 @@
           <a:bodyPr wrap="square" lIns="0" tIns="0" rIns="0" bIns="0" rtlCol="0" anchor="ctr"/>
           <a:lstStyle/>
           <a:p>
-            <a:pPr algn="ctr" indent="0" marL="0">
+            <a:pPr marL="0" indent="0" algn="ctr">
               <a:buNone/>
             </a:pPr>
             <a:r>
@@ -12240,6 +12553,13 @@
           </a:solidFill>
           <a:ln/>
         </p:spPr>
+        <p:txBody>
+          <a:bodyPr/>
+          <a:lstStyle/>
+          <a:p>
+            <a:endParaRPr lang="en-US"/>
+          </a:p>
+        </p:txBody>
       </p:sp>
       <p:sp>
         <p:nvSpPr>
@@ -12262,7 +12582,7 @@
           <a:bodyPr wrap="square" lIns="50800" tIns="50800" rIns="50800" bIns="50800" rtlCol="0" anchor="ctr"/>
           <a:lstStyle/>
           <a:p>
-            <a:pPr algn="l" indent="0" marL="0">
+            <a:pPr marL="0" indent="0" algn="l">
               <a:buNone/>
             </a:pPr>
             <a:r>
@@ -12299,6 +12619,13 @@
           </a:solidFill>
           <a:ln/>
         </p:spPr>
+        <p:txBody>
+          <a:bodyPr/>
+          <a:lstStyle/>
+          <a:p>
+            <a:endParaRPr lang="en-US"/>
+          </a:p>
+        </p:txBody>
       </p:sp>
       <p:sp>
         <p:nvSpPr>
@@ -12321,7 +12648,7 @@
           <a:bodyPr wrap="square" lIns="0" tIns="0" rIns="0" bIns="0" rtlCol="0" anchor="ctr"/>
           <a:lstStyle/>
           <a:p>
-            <a:pPr algn="ctr" indent="0" marL="0">
+            <a:pPr marL="0" indent="0" algn="ctr">
               <a:buNone/>
             </a:pPr>
             <a:r>
@@ -12358,6 +12685,13 @@
           </a:solidFill>
           <a:ln/>
         </p:spPr>
+        <p:txBody>
+          <a:bodyPr/>
+          <a:lstStyle/>
+          <a:p>
+            <a:endParaRPr lang="en-US"/>
+          </a:p>
+        </p:txBody>
       </p:sp>
       <p:sp>
         <p:nvSpPr>
@@ -12380,7 +12714,7 @@
           <a:bodyPr wrap="square" lIns="0" tIns="0" rIns="0" bIns="0" rtlCol="0" anchor="ctr"/>
           <a:lstStyle/>
           <a:p>
-            <a:pPr algn="ctr" indent="0" marL="0">
+            <a:pPr marL="0" indent="0" algn="ctr">
               <a:buNone/>
             </a:pPr>
             <a:r>
@@ -12417,6 +12751,13 @@
           </a:solidFill>
           <a:ln/>
         </p:spPr>
+        <p:txBody>
+          <a:bodyPr/>
+          <a:lstStyle/>
+          <a:p>
+            <a:endParaRPr lang="en-US"/>
+          </a:p>
+        </p:txBody>
       </p:sp>
       <p:sp>
         <p:nvSpPr>
@@ -12439,7 +12780,7 @@
           <a:bodyPr wrap="square" lIns="0" tIns="0" rIns="0" bIns="0" rtlCol="0" anchor="ctr"/>
           <a:lstStyle/>
           <a:p>
-            <a:pPr algn="ctr" indent="0" marL="0">
+            <a:pPr marL="0" indent="0" algn="ctr">
               <a:buNone/>
             </a:pPr>
             <a:r>
@@ -12476,6 +12817,13 @@
           </a:solidFill>
           <a:ln/>
         </p:spPr>
+        <p:txBody>
+          <a:bodyPr/>
+          <a:lstStyle/>
+          <a:p>
+            <a:endParaRPr lang="en-US"/>
+          </a:p>
+        </p:txBody>
       </p:sp>
       <p:sp>
         <p:nvSpPr>
@@ -12498,7 +12846,7 @@
           <a:bodyPr wrap="square" lIns="0" tIns="0" rIns="0" bIns="0" rtlCol="0" anchor="ctr"/>
           <a:lstStyle/>
           <a:p>
-            <a:pPr algn="ctr" indent="0" marL="0">
+            <a:pPr marL="0" indent="0" algn="ctr">
               <a:buNone/>
             </a:pPr>
             <a:r>
@@ -12537,7 +12885,7 @@
           <a:bodyPr wrap="square" lIns="50800" tIns="50800" rIns="50800" bIns="50800" rtlCol="0" anchor="ctr"/>
           <a:lstStyle/>
           <a:p>
-            <a:pPr algn="l" indent="0" marL="0">
+            <a:pPr marL="0" indent="0" algn="l">
               <a:buNone/>
             </a:pPr>
             <a:r>
@@ -12576,7 +12924,7 @@
           <a:bodyPr wrap="square" lIns="0" tIns="0" rIns="0" bIns="0" rtlCol="0" anchor="ctr"/>
           <a:lstStyle/>
           <a:p>
-            <a:pPr algn="ctr" indent="0" marL="0">
+            <a:pPr marL="0" indent="0" algn="ctr">
               <a:buNone/>
             </a:pPr>
             <a:r>
@@ -12615,7 +12963,7 @@
           <a:bodyPr wrap="square" lIns="0" tIns="0" rIns="0" bIns="0" rtlCol="0" anchor="ctr"/>
           <a:lstStyle/>
           <a:p>
-            <a:pPr algn="ctr" indent="0" marL="0">
+            <a:pPr marL="0" indent="0" algn="ctr">
               <a:buNone/>
             </a:pPr>
             <a:r>
@@ -12654,7 +13002,7 @@
           <a:bodyPr wrap="square" lIns="0" tIns="0" rIns="0" bIns="0" rtlCol="0" anchor="ctr"/>
           <a:lstStyle/>
           <a:p>
-            <a:pPr algn="ctr" indent="0" marL="0">
+            <a:pPr marL="0" indent="0" algn="ctr">
               <a:buNone/>
             </a:pPr>
             <a:r>
@@ -12693,7 +13041,7 @@
           <a:bodyPr wrap="square" lIns="0" tIns="0" rIns="0" bIns="0" rtlCol="0" anchor="ctr"/>
           <a:lstStyle/>
           <a:p>
-            <a:pPr algn="ctr" indent="0" marL="0">
+            <a:pPr marL="0" indent="0" algn="ctr">
               <a:buNone/>
             </a:pPr>
             <a:r>
@@ -12730,6 +13078,13 @@
           </a:solidFill>
           <a:ln/>
         </p:spPr>
+        <p:txBody>
+          <a:bodyPr/>
+          <a:lstStyle/>
+          <a:p>
+            <a:endParaRPr lang="en-US"/>
+          </a:p>
+        </p:txBody>
       </p:sp>
       <p:sp>
         <p:nvSpPr>
@@ -12752,7 +13107,7 @@
           <a:bodyPr wrap="square" lIns="50800" tIns="50800" rIns="50800" bIns="50800" rtlCol="0" anchor="ctr"/>
           <a:lstStyle/>
           <a:p>
-            <a:pPr algn="l" indent="0" marL="0">
+            <a:pPr marL="0" indent="0" algn="l">
               <a:buNone/>
             </a:pPr>
             <a:r>
@@ -12789,6 +13144,13 @@
           </a:solidFill>
           <a:ln/>
         </p:spPr>
+        <p:txBody>
+          <a:bodyPr/>
+          <a:lstStyle/>
+          <a:p>
+            <a:endParaRPr lang="en-US"/>
+          </a:p>
+        </p:txBody>
       </p:sp>
       <p:sp>
         <p:nvSpPr>
@@ -12811,7 +13173,7 @@
           <a:bodyPr wrap="square" lIns="0" tIns="0" rIns="0" bIns="0" rtlCol="0" anchor="ctr"/>
           <a:lstStyle/>
           <a:p>
-            <a:pPr algn="ctr" indent="0" marL="0">
+            <a:pPr marL="0" indent="0" algn="ctr">
               <a:buNone/>
             </a:pPr>
             <a:r>
@@ -12848,6 +13210,13 @@
           </a:solidFill>
           <a:ln/>
         </p:spPr>
+        <p:txBody>
+          <a:bodyPr/>
+          <a:lstStyle/>
+          <a:p>
+            <a:endParaRPr lang="en-US"/>
+          </a:p>
+        </p:txBody>
       </p:sp>
       <p:sp>
         <p:nvSpPr>
@@ -12870,7 +13239,7 @@
           <a:bodyPr wrap="square" lIns="0" tIns="0" rIns="0" bIns="0" rtlCol="0" anchor="ctr"/>
           <a:lstStyle/>
           <a:p>
-            <a:pPr algn="ctr" indent="0" marL="0">
+            <a:pPr marL="0" indent="0" algn="ctr">
               <a:buNone/>
             </a:pPr>
             <a:r>
@@ -12907,6 +13276,13 @@
           </a:solidFill>
           <a:ln/>
         </p:spPr>
+        <p:txBody>
+          <a:bodyPr/>
+          <a:lstStyle/>
+          <a:p>
+            <a:endParaRPr lang="en-US"/>
+          </a:p>
+        </p:txBody>
       </p:sp>
       <p:sp>
         <p:nvSpPr>
@@ -12929,7 +13305,7 @@
           <a:bodyPr wrap="square" lIns="0" tIns="0" rIns="0" bIns="0" rtlCol="0" anchor="ctr"/>
           <a:lstStyle/>
           <a:p>
-            <a:pPr algn="ctr" indent="0" marL="0">
+            <a:pPr marL="0" indent="0" algn="ctr">
               <a:buNone/>
             </a:pPr>
             <a:r>
@@ -12966,6 +13342,13 @@
           </a:solidFill>
           <a:ln/>
         </p:spPr>
+        <p:txBody>
+          <a:bodyPr/>
+          <a:lstStyle/>
+          <a:p>
+            <a:endParaRPr lang="en-US"/>
+          </a:p>
+        </p:txBody>
       </p:sp>
       <p:sp>
         <p:nvSpPr>
@@ -12988,7 +13371,7 @@
           <a:bodyPr wrap="square" lIns="0" tIns="0" rIns="0" bIns="0" rtlCol="0" anchor="ctr"/>
           <a:lstStyle/>
           <a:p>
-            <a:pPr algn="ctr" indent="0" marL="0">
+            <a:pPr marL="0" indent="0" algn="ctr">
               <a:buNone/>
             </a:pPr>
             <a:r>
@@ -13027,7 +13410,7 @@
           <a:bodyPr wrap="square" lIns="50800" tIns="50800" rIns="50800" bIns="50800" rtlCol="0" anchor="ctr"/>
           <a:lstStyle/>
           <a:p>
-            <a:pPr algn="l" indent="0" marL="0">
+            <a:pPr marL="0" indent="0" algn="l">
               <a:buNone/>
             </a:pPr>
             <a:r>
@@ -13066,7 +13449,7 @@
           <a:bodyPr wrap="square" lIns="0" tIns="0" rIns="0" bIns="0" rtlCol="0" anchor="ctr"/>
           <a:lstStyle/>
           <a:p>
-            <a:pPr algn="ctr" indent="0" marL="0">
+            <a:pPr marL="0" indent="0" algn="ctr">
               <a:buNone/>
             </a:pPr>
             <a:r>
@@ -13105,7 +13488,7 @@
           <a:bodyPr wrap="square" lIns="0" tIns="0" rIns="0" bIns="0" rtlCol="0" anchor="ctr"/>
           <a:lstStyle/>
           <a:p>
-            <a:pPr algn="ctr" indent="0" marL="0">
+            <a:pPr marL="0" indent="0" algn="ctr">
               <a:buNone/>
             </a:pPr>
             <a:r>
@@ -13144,7 +13527,7 @@
           <a:bodyPr wrap="square" lIns="0" tIns="0" rIns="0" bIns="0" rtlCol="0" anchor="ctr"/>
           <a:lstStyle/>
           <a:p>
-            <a:pPr algn="ctr" indent="0" marL="0">
+            <a:pPr marL="0" indent="0" algn="ctr">
               <a:buNone/>
             </a:pPr>
             <a:r>
@@ -13183,7 +13566,7 @@
           <a:bodyPr wrap="square" lIns="0" tIns="0" rIns="0" bIns="0" rtlCol="0" anchor="ctr"/>
           <a:lstStyle/>
           <a:p>
-            <a:pPr algn="ctr" indent="0" marL="0">
+            <a:pPr marL="0" indent="0" algn="ctr">
               <a:buNone/>
             </a:pPr>
             <a:r>
@@ -13220,6 +13603,13 @@
           </a:solidFill>
           <a:ln/>
         </p:spPr>
+        <p:txBody>
+          <a:bodyPr/>
+          <a:lstStyle/>
+          <a:p>
+            <a:endParaRPr lang="en-US"/>
+          </a:p>
+        </p:txBody>
       </p:sp>
       <p:sp>
         <p:nvSpPr>
@@ -13242,7 +13632,7 @@
           <a:bodyPr wrap="square" lIns="50800" tIns="50800" rIns="50800" bIns="50800" rtlCol="0" anchor="ctr"/>
           <a:lstStyle/>
           <a:p>
-            <a:pPr algn="l" indent="0" marL="0">
+            <a:pPr marL="0" indent="0" algn="l">
               <a:buNone/>
             </a:pPr>
             <a:r>
@@ -13279,6 +13669,13 @@
           </a:solidFill>
           <a:ln/>
         </p:spPr>
+        <p:txBody>
+          <a:bodyPr/>
+          <a:lstStyle/>
+          <a:p>
+            <a:endParaRPr lang="en-US"/>
+          </a:p>
+        </p:txBody>
       </p:sp>
       <p:sp>
         <p:nvSpPr>
@@ -13301,7 +13698,7 @@
           <a:bodyPr wrap="square" lIns="0" tIns="0" rIns="0" bIns="0" rtlCol="0" anchor="ctr"/>
           <a:lstStyle/>
           <a:p>
-            <a:pPr algn="ctr" indent="0" marL="0">
+            <a:pPr marL="0" indent="0" algn="ctr">
               <a:buNone/>
             </a:pPr>
             <a:r>
@@ -13338,6 +13735,13 @@
           </a:solidFill>
           <a:ln/>
         </p:spPr>
+        <p:txBody>
+          <a:bodyPr/>
+          <a:lstStyle/>
+          <a:p>
+            <a:endParaRPr lang="en-US"/>
+          </a:p>
+        </p:txBody>
       </p:sp>
       <p:sp>
         <p:nvSpPr>
@@ -13360,7 +13764,7 @@
           <a:bodyPr wrap="square" lIns="0" tIns="0" rIns="0" bIns="0" rtlCol="0" anchor="ctr"/>
           <a:lstStyle/>
           <a:p>
-            <a:pPr algn="ctr" indent="0" marL="0">
+            <a:pPr marL="0" indent="0" algn="ctr">
               <a:buNone/>
             </a:pPr>
             <a:r>
@@ -13397,6 +13801,13 @@
           </a:solidFill>
           <a:ln/>
         </p:spPr>
+        <p:txBody>
+          <a:bodyPr/>
+          <a:lstStyle/>
+          <a:p>
+            <a:endParaRPr lang="en-US"/>
+          </a:p>
+        </p:txBody>
       </p:sp>
       <p:sp>
         <p:nvSpPr>
@@ -13419,7 +13830,7 @@
           <a:bodyPr wrap="square" lIns="0" tIns="0" rIns="0" bIns="0" rtlCol="0" anchor="ctr"/>
           <a:lstStyle/>
           <a:p>
-            <a:pPr algn="ctr" indent="0" marL="0">
+            <a:pPr marL="0" indent="0" algn="ctr">
               <a:buNone/>
             </a:pPr>
             <a:r>
@@ -13456,6 +13867,13 @@
           </a:solidFill>
           <a:ln/>
         </p:spPr>
+        <p:txBody>
+          <a:bodyPr/>
+          <a:lstStyle/>
+          <a:p>
+            <a:endParaRPr lang="en-US"/>
+          </a:p>
+        </p:txBody>
       </p:sp>
       <p:sp>
         <p:nvSpPr>
@@ -13478,7 +13896,7 @@
           <a:bodyPr wrap="square" lIns="0" tIns="0" rIns="0" bIns="0" rtlCol="0" anchor="ctr"/>
           <a:lstStyle/>
           <a:p>
-            <a:pPr algn="ctr" indent="0" marL="0">
+            <a:pPr marL="0" indent="0" algn="ctr">
               <a:buNone/>
             </a:pPr>
             <a:r>
@@ -13517,7 +13935,7 @@
           <a:bodyPr wrap="square" lIns="50800" tIns="50800" rIns="50800" bIns="50800" rtlCol="0" anchor="ctr"/>
           <a:lstStyle/>
           <a:p>
-            <a:pPr algn="l" indent="0" marL="0">
+            <a:pPr marL="0" indent="0" algn="l">
               <a:buNone/>
             </a:pPr>
             <a:r>
@@ -13556,7 +13974,7 @@
           <a:bodyPr wrap="square" lIns="0" tIns="0" rIns="0" bIns="0" rtlCol="0" anchor="ctr"/>
           <a:lstStyle/>
           <a:p>
-            <a:pPr algn="ctr" indent="0" marL="0">
+            <a:pPr marL="0" indent="0" algn="ctr">
               <a:buNone/>
             </a:pPr>
             <a:r>
@@ -13595,7 +14013,7 @@
           <a:bodyPr wrap="square" lIns="0" tIns="0" rIns="0" bIns="0" rtlCol="0" anchor="ctr"/>
           <a:lstStyle/>
           <a:p>
-            <a:pPr algn="ctr" indent="0" marL="0">
+            <a:pPr marL="0" indent="0" algn="ctr">
               <a:buNone/>
             </a:pPr>
             <a:r>
@@ -13634,7 +14052,7 @@
           <a:bodyPr wrap="square" lIns="0" tIns="0" rIns="0" bIns="0" rtlCol="0" anchor="ctr"/>
           <a:lstStyle/>
           <a:p>
-            <a:pPr algn="ctr" indent="0" marL="0">
+            <a:pPr marL="0" indent="0" algn="ctr">
               <a:buNone/>
             </a:pPr>
             <a:r>
@@ -13673,7 +14091,7 @@
           <a:bodyPr wrap="square" lIns="0" tIns="0" rIns="0" bIns="0" rtlCol="0" anchor="ctr"/>
           <a:lstStyle/>
           <a:p>
-            <a:pPr algn="ctr" indent="0" marL="0">
+            <a:pPr marL="0" indent="0" algn="ctr">
               <a:buNone/>
             </a:pPr>
             <a:r>
@@ -13712,7 +14130,7 @@
           <a:bodyPr wrap="square" rtlCol="0" anchor="ctr"/>
           <a:lstStyle/>
           <a:p>
-            <a:pPr algn="r" indent="0" marL="0">
+            <a:pPr marL="0" indent="0" algn="r">
               <a:buNone/>
             </a:pPr>
             <a:r>
@@ -14028,4 +14446,319 @@
     </a:ext>
   </a:extLst>
 </a:theme>
+</file>
+
+<file path=ppt/theme/theme2.xml><?xml version="1.0" encoding="utf-8"?>
+<a:theme xmlns:a="http://schemas.openxmlformats.org/drawingml/2006/main" name="Office Theme">
+  <a:themeElements>
+    <a:clrScheme name="Office">
+      <a:dk1>
+        <a:sysClr val="windowText" lastClr="000000"/>
+      </a:dk1>
+      <a:lt1>
+        <a:sysClr val="window" lastClr="FFFFFF"/>
+      </a:lt1>
+      <a:dk2>
+        <a:srgbClr val="0E2841"/>
+      </a:dk2>
+      <a:lt2>
+        <a:srgbClr val="E8E8E8"/>
+      </a:lt2>
+      <a:accent1>
+        <a:srgbClr val="156082"/>
+      </a:accent1>
+      <a:accent2>
+        <a:srgbClr val="E97132"/>
+      </a:accent2>
+      <a:accent3>
+        <a:srgbClr val="196B24"/>
+      </a:accent3>
+      <a:accent4>
+        <a:srgbClr val="0F9ED5"/>
+      </a:accent4>
+      <a:accent5>
+        <a:srgbClr val="A02B93"/>
+      </a:accent5>
+      <a:accent6>
+        <a:srgbClr val="4EA72E"/>
+      </a:accent6>
+      <a:hlink>
+        <a:srgbClr val="467886"/>
+      </a:hlink>
+      <a:folHlink>
+        <a:srgbClr val="96607D"/>
+      </a:folHlink>
+    </a:clrScheme>
+    <a:fontScheme name="Office">
+      <a:majorFont>
+        <a:latin typeface="Aptos Display" panose="02110004020202020204"/>
+        <a:ea typeface=""/>
+        <a:cs typeface=""/>
+        <a:font script="Jpan" typeface="游ゴシック Light"/>
+        <a:font script="Hang" typeface="맑은 고딕"/>
+        <a:font script="Hans" typeface="等线 Light"/>
+        <a:font script="Hant" typeface="新細明體"/>
+        <a:font script="Arab" typeface="Times New Roman"/>
+        <a:font script="Hebr" typeface="Times New Roman"/>
+        <a:font script="Thai" typeface="Angsana New"/>
+        <a:font script="Ethi" typeface="Nyala"/>
+        <a:font script="Beng" typeface="Vrinda"/>
+        <a:font script="Gujr" typeface="Shruti"/>
+        <a:font script="Khmr" typeface="MoolBoran"/>
+        <a:font script="Knda" typeface="Tunga"/>
+        <a:font script="Guru" typeface="Raavi"/>
+        <a:font script="Cans" typeface="Euphemia"/>
+        <a:font script="Cher" typeface="Plantagenet Cherokee"/>
+        <a:font script="Yiii" typeface="Microsoft Yi Baiti"/>
+        <a:font script="Tibt" typeface="Microsoft Himalaya"/>
+        <a:font script="Thaa" typeface="MV Boli"/>
+        <a:font script="Deva" typeface="Mangal"/>
+        <a:font script="Telu" typeface="Gautami"/>
+        <a:font script="Taml" typeface="Latha"/>
+        <a:font script="Syrc" typeface="Estrangelo Edessa"/>
+        <a:font script="Orya" typeface="Kalinga"/>
+        <a:font script="Mlym" typeface="Kartika"/>
+        <a:font script="Laoo" typeface="DokChampa"/>
+        <a:font script="Sinh" typeface="Iskoola Pota"/>
+        <a:font script="Mong" typeface="Mongolian Baiti"/>
+        <a:font script="Viet" typeface="Times New Roman"/>
+        <a:font script="Uigh" typeface="Microsoft Uighur"/>
+        <a:font script="Geor" typeface="Sylfaen"/>
+        <a:font script="Armn" typeface="Arial"/>
+        <a:font script="Bugi" typeface="Leelawadee UI"/>
+        <a:font script="Bopo" typeface="Microsoft JhengHei"/>
+        <a:font script="Java" typeface="Javanese Text"/>
+        <a:font script="Lisu" typeface="Segoe UI"/>
+        <a:font script="Mymr" typeface="Myanmar Text"/>
+        <a:font script="Nkoo" typeface="Ebrima"/>
+        <a:font script="Olck" typeface="Nirmala UI"/>
+        <a:font script="Osma" typeface="Ebrima"/>
+        <a:font script="Phag" typeface="Phagspa"/>
+        <a:font script="Syrn" typeface="Estrangelo Edessa"/>
+        <a:font script="Syrj" typeface="Estrangelo Edessa"/>
+        <a:font script="Syre" typeface="Estrangelo Edessa"/>
+        <a:font script="Sora" typeface="Nirmala UI"/>
+        <a:font script="Tale" typeface="Microsoft Tai Le"/>
+        <a:font script="Talu" typeface="Microsoft New Tai Lue"/>
+        <a:font script="Tfng" typeface="Ebrima"/>
+      </a:majorFont>
+      <a:minorFont>
+        <a:latin typeface="Aptos" panose="02110004020202020204"/>
+        <a:ea typeface=""/>
+        <a:cs typeface=""/>
+        <a:font script="Jpan" typeface="游ゴシック"/>
+        <a:font script="Hang" typeface="맑은 고딕"/>
+        <a:font script="Hans" typeface="等线"/>
+        <a:font script="Hant" typeface="新細明體"/>
+        <a:font script="Arab" typeface="Arial"/>
+        <a:font script="Hebr" typeface="Arial"/>
+        <a:font script="Thai" typeface="Cordia New"/>
+        <a:font script="Ethi" typeface="Nyala"/>
+        <a:font script="Beng" typeface="Vrinda"/>
+        <a:font script="Gujr" typeface="Shruti"/>
+        <a:font script="Khmr" typeface="DaunPenh"/>
+        <a:font script="Knda" typeface="Tunga"/>
+        <a:font script="Guru" typeface="Raavi"/>
+        <a:font script="Cans" typeface="Euphemia"/>
+        <a:font script="Cher" typeface="Plantagenet Cherokee"/>
+        <a:font script="Yiii" typeface="Microsoft Yi Baiti"/>
+        <a:font script="Tibt" typeface="Microsoft Himalaya"/>
+        <a:font script="Thaa" typeface="MV Boli"/>
+        <a:font script="Deva" typeface="Mangal"/>
+        <a:font script="Telu" typeface="Gautami"/>
+        <a:font script="Taml" typeface="Latha"/>
+        <a:font script="Syrc" typeface="Estrangelo Edessa"/>
+        <a:font script="Orya" typeface="Kalinga"/>
+        <a:font script="Mlym" typeface="Kartika"/>
+        <a:font script="Laoo" typeface="DokChampa"/>
+        <a:font script="Sinh" typeface="Iskoola Pota"/>
+        <a:font script="Mong" typeface="Mongolian Baiti"/>
+        <a:font script="Viet" typeface="Arial"/>
+        <a:font script="Uigh" typeface="Microsoft Uighur"/>
+        <a:font script="Geor" typeface="Sylfaen"/>
+        <a:font script="Armn" typeface="Arial"/>
+        <a:font script="Bugi" typeface="Leelawadee UI"/>
+        <a:font script="Bopo" typeface="Microsoft JhengHei"/>
+        <a:font script="Java" typeface="Javanese Text"/>
+        <a:font script="Lisu" typeface="Segoe UI"/>
+        <a:font script="Mymr" typeface="Myanmar Text"/>
+        <a:font script="Nkoo" typeface="Ebrima"/>
+        <a:font script="Olck" typeface="Nirmala UI"/>
+        <a:font script="Osma" typeface="Ebrima"/>
+        <a:font script="Phag" typeface="Phagspa"/>
+        <a:font script="Syrn" typeface="Estrangelo Edessa"/>
+        <a:font script="Syrj" typeface="Estrangelo Edessa"/>
+        <a:font script="Syre" typeface="Estrangelo Edessa"/>
+        <a:font script="Sora" typeface="Nirmala UI"/>
+        <a:font script="Tale" typeface="Microsoft Tai Le"/>
+        <a:font script="Talu" typeface="Microsoft New Tai Lue"/>
+        <a:font script="Tfng" typeface="Ebrima"/>
+      </a:minorFont>
+    </a:fontScheme>
+    <a:fmtScheme name="Office">
+      <a:fillStyleLst>
+        <a:solidFill>
+          <a:schemeClr val="phClr"/>
+        </a:solidFill>
+        <a:gradFill rotWithShape="1">
+          <a:gsLst>
+            <a:gs pos="0">
+              <a:schemeClr val="phClr">
+                <a:lumMod val="110000"/>
+                <a:satMod val="105000"/>
+                <a:tint val="67000"/>
+              </a:schemeClr>
+            </a:gs>
+            <a:gs pos="50000">
+              <a:schemeClr val="phClr">
+                <a:lumMod val="105000"/>
+                <a:satMod val="103000"/>
+                <a:tint val="73000"/>
+              </a:schemeClr>
+            </a:gs>
+            <a:gs pos="100000">
+              <a:schemeClr val="phClr">
+                <a:lumMod val="105000"/>
+                <a:satMod val="109000"/>
+                <a:tint val="81000"/>
+              </a:schemeClr>
+            </a:gs>
+          </a:gsLst>
+          <a:lin ang="5400000" scaled="0"/>
+        </a:gradFill>
+        <a:gradFill rotWithShape="1">
+          <a:gsLst>
+            <a:gs pos="0">
+              <a:schemeClr val="phClr">
+                <a:satMod val="103000"/>
+                <a:lumMod val="102000"/>
+                <a:tint val="94000"/>
+              </a:schemeClr>
+            </a:gs>
+            <a:gs pos="50000">
+              <a:schemeClr val="phClr">
+                <a:satMod val="110000"/>
+                <a:lumMod val="100000"/>
+                <a:shade val="100000"/>
+              </a:schemeClr>
+            </a:gs>
+            <a:gs pos="100000">
+              <a:schemeClr val="phClr">
+                <a:lumMod val="99000"/>
+                <a:satMod val="120000"/>
+                <a:shade val="78000"/>
+              </a:schemeClr>
+            </a:gs>
+          </a:gsLst>
+          <a:lin ang="5400000" scaled="0"/>
+        </a:gradFill>
+      </a:fillStyleLst>
+      <a:lnStyleLst>
+        <a:ln w="12700" cap="flat" cmpd="sng" algn="ctr">
+          <a:solidFill>
+            <a:schemeClr val="phClr"/>
+          </a:solidFill>
+          <a:prstDash val="solid"/>
+          <a:miter lim="800000"/>
+        </a:ln>
+        <a:ln w="19050" cap="flat" cmpd="sng" algn="ctr">
+          <a:solidFill>
+            <a:schemeClr val="phClr"/>
+          </a:solidFill>
+          <a:prstDash val="solid"/>
+          <a:miter lim="800000"/>
+        </a:ln>
+        <a:ln w="25400" cap="flat" cmpd="sng" algn="ctr">
+          <a:solidFill>
+            <a:schemeClr val="phClr"/>
+          </a:solidFill>
+          <a:prstDash val="solid"/>
+          <a:miter lim="800000"/>
+        </a:ln>
+      </a:lnStyleLst>
+      <a:effectStyleLst>
+        <a:effectStyle>
+          <a:effectLst/>
+        </a:effectStyle>
+        <a:effectStyle>
+          <a:effectLst/>
+        </a:effectStyle>
+        <a:effectStyle>
+          <a:effectLst>
+            <a:outerShdw blurRad="57150" dist="19050" dir="5400000" algn="ctr" rotWithShape="0">
+              <a:srgbClr val="000000">
+                <a:alpha val="63000"/>
+              </a:srgbClr>
+            </a:outerShdw>
+          </a:effectLst>
+        </a:effectStyle>
+      </a:effectStyleLst>
+      <a:bgFillStyleLst>
+        <a:solidFill>
+          <a:schemeClr val="phClr"/>
+        </a:solidFill>
+        <a:solidFill>
+          <a:schemeClr val="phClr">
+            <a:tint val="95000"/>
+            <a:satMod val="170000"/>
+          </a:schemeClr>
+        </a:solidFill>
+        <a:gradFill rotWithShape="1">
+          <a:gsLst>
+            <a:gs pos="0">
+              <a:schemeClr val="phClr">
+                <a:tint val="93000"/>
+                <a:satMod val="150000"/>
+                <a:shade val="98000"/>
+                <a:lumMod val="102000"/>
+              </a:schemeClr>
+            </a:gs>
+            <a:gs pos="50000">
+              <a:schemeClr val="phClr">
+                <a:tint val="98000"/>
+                <a:satMod val="130000"/>
+                <a:shade val="90000"/>
+                <a:lumMod val="103000"/>
+              </a:schemeClr>
+            </a:gs>
+            <a:gs pos="100000">
+              <a:schemeClr val="phClr">
+                <a:shade val="63000"/>
+                <a:satMod val="120000"/>
+              </a:schemeClr>
+            </a:gs>
+          </a:gsLst>
+          <a:lin ang="5400000" scaled="0"/>
+        </a:gradFill>
+      </a:bgFillStyleLst>
+    </a:fmtScheme>
+  </a:themeElements>
+  <a:objectDefaults>
+    <a:lnDef>
+      <a:spPr/>
+      <a:bodyPr/>
+      <a:lstStyle/>
+      <a:style>
+        <a:lnRef idx="2">
+          <a:schemeClr val="accent1"/>
+        </a:lnRef>
+        <a:fillRef idx="0">
+          <a:schemeClr val="accent1"/>
+        </a:fillRef>
+        <a:effectRef idx="1">
+          <a:schemeClr val="accent1"/>
+        </a:effectRef>
+        <a:fontRef idx="minor">
+          <a:schemeClr val="tx1"/>
+        </a:fontRef>
+      </a:style>
+    </a:lnDef>
+  </a:objectDefaults>
+  <a:extraClrSchemeLst/>
+  <a:extLst>
+    <a:ext uri="{05A4C25C-085E-4340-85A3-A5531E510DB2}">
+      <thm15:themeFamily xmlns:thm15="http://schemas.microsoft.com/office/thememl/2012/main" name="Office Theme" id="{2E142A2C-CD16-42D6-873A-C26D2A0506FA}" vid="{1BDDFF52-6CD6-40A5-AB3C-68EB2F1E4D0A}"/>
+    </a:ext>
+  </a:extLst>
+</a:theme>
 </file>